--- a/backend/FINAL REVIEW.pptx
+++ b/backend/FINAL REVIEW.pptx
@@ -5,25 +5,27 @@
     <p:sldMasterId id="2147483912" r:id="rId4"/>
   </p:sldMasterIdLst>
   <p:notesMasterIdLst>
-    <p:notesMasterId r:id="rId18"/>
+    <p:notesMasterId r:id="rId20"/>
   </p:notesMasterIdLst>
   <p:handoutMasterIdLst>
-    <p:handoutMasterId r:id="rId19"/>
+    <p:handoutMasterId r:id="rId21"/>
   </p:handoutMasterIdLst>
   <p:sldIdLst>
     <p:sldId id="1497" r:id="rId5"/>
     <p:sldId id="1514" r:id="rId6"/>
-    <p:sldId id="1499" r:id="rId7"/>
-    <p:sldId id="1515" r:id="rId8"/>
-    <p:sldId id="1521" r:id="rId9"/>
-    <p:sldId id="1522" r:id="rId10"/>
-    <p:sldId id="1523" r:id="rId11"/>
-    <p:sldId id="1516" r:id="rId12"/>
-    <p:sldId id="1524" r:id="rId13"/>
-    <p:sldId id="1518" r:id="rId14"/>
-    <p:sldId id="1526" r:id="rId15"/>
-    <p:sldId id="1527" r:id="rId16"/>
-    <p:sldId id="1525" r:id="rId17"/>
+    <p:sldId id="1529" r:id="rId7"/>
+    <p:sldId id="1528" r:id="rId8"/>
+    <p:sldId id="1499" r:id="rId9"/>
+    <p:sldId id="1515" r:id="rId10"/>
+    <p:sldId id="1521" r:id="rId11"/>
+    <p:sldId id="1522" r:id="rId12"/>
+    <p:sldId id="1526" r:id="rId13"/>
+    <p:sldId id="1527" r:id="rId14"/>
+    <p:sldId id="1523" r:id="rId15"/>
+    <p:sldId id="1516" r:id="rId16"/>
+    <p:sldId id="1524" r:id="rId17"/>
+    <p:sldId id="1518" r:id="rId18"/>
+    <p:sldId id="1530" r:id="rId19"/>
   </p:sldIdLst>
   <p:sldSz cx="12192000" cy="6858000"/>
   <p:notesSz cx="6858000" cy="9144000"/>
@@ -227,7 +229,7 @@
           <a:p>
             <a:fld id="{D5D1EC30-5B0B-48D0-A1A8-66A96720DF24}" type="datetimeFigureOut">
               <a:rPr lang="en-US" smtClean="0"/>
-              <a:t>9/1/2026</a:t>
+              <a:t>9/2/2026</a:t>
             </a:fld>
             <a:endParaRPr lang="en-US" dirty="0"/>
           </a:p>
@@ -404,7 +406,7 @@
           <a:p>
             <a:fld id="{69F68A4D-42A7-45F7-9930-00E8DCB48D7E}" type="datetimeFigureOut">
               <a:rPr lang="en-US" smtClean="0"/>
-              <a:t>9/1/2026</a:t>
+              <a:t>9/2/2026</a:t>
             </a:fld>
             <a:endParaRPr lang="en-US" dirty="0"/>
           </a:p>
@@ -676,90 +678,6 @@
   <p:cSld>
     <p:spTree>
       <p:nvGrpSpPr>
-        <p:cNvPr id="1" name=""/>
-        <p:cNvGrpSpPr/>
-        <p:nvPr/>
-      </p:nvGrpSpPr>
-      <p:grpSpPr>
-        <a:xfrm>
-          <a:off x="0" y="0"/>
-          <a:ext cx="0" cy="0"/>
-          <a:chOff x="0" y="0"/>
-          <a:chExt cx="0" cy="0"/>
-        </a:xfrm>
-      </p:grpSpPr>
-      <p:sp>
-        <p:nvSpPr>
-          <p:cNvPr id="2" name="Slide Image Placeholder 1"/>
-          <p:cNvSpPr>
-            <a:spLocks noGrp="1" noRot="1" noChangeAspect="1"/>
-          </p:cNvSpPr>
-          <p:nvPr>
-            <p:ph type="sldImg"/>
-          </p:nvPr>
-        </p:nvSpPr>
-        <p:spPr/>
-      </p:sp>
-      <p:sp>
-        <p:nvSpPr>
-          <p:cNvPr id="3" name="Notes Placeholder 2"/>
-          <p:cNvSpPr>
-            <a:spLocks noGrp="1"/>
-          </p:cNvSpPr>
-          <p:nvPr>
-            <p:ph type="body" idx="1"/>
-          </p:nvPr>
-        </p:nvSpPr>
-        <p:spPr/>
-        <p:txBody>
-          <a:bodyPr/>
-          <a:lstStyle/>
-          <a:p>
-            <a:endParaRPr lang="en-IN" dirty="0"/>
-          </a:p>
-        </p:txBody>
-      </p:sp>
-      <p:sp>
-        <p:nvSpPr>
-          <p:cNvPr id="4" name="Slide Number Placeholder 3"/>
-          <p:cNvSpPr>
-            <a:spLocks noGrp="1"/>
-          </p:cNvSpPr>
-          <p:nvPr>
-            <p:ph type="sldNum" sz="quarter" idx="5"/>
-          </p:nvPr>
-        </p:nvSpPr>
-        <p:spPr/>
-        <p:txBody>
-          <a:bodyPr/>
-          <a:lstStyle/>
-          <a:p>
-            <a:fld id="{BFDD6F49-EBB7-4CCF-97A8-E526BB28BB69}" type="slidenum">
-              <a:rPr lang="en-US" smtClean="0"/>
-              <a:t>7</a:t>
-            </a:fld>
-            <a:endParaRPr lang="en-US" dirty="0"/>
-          </a:p>
-        </p:txBody>
-      </p:sp>
-    </p:spTree>
-    <p:extLst>
-      <p:ext uri="{BB962C8B-B14F-4D97-AF65-F5344CB8AC3E}">
-        <p14:creationId xmlns:p14="http://schemas.microsoft.com/office/powerpoint/2010/main" val="1484094776"/>
-      </p:ext>
-    </p:extLst>
-  </p:cSld>
-  <p:clrMapOvr>
-    <a:masterClrMapping/>
-  </p:clrMapOvr>
-</p:notes>
-</file>
-
-<file path=ppt/notesSlides/notesSlide2.xml><?xml version="1.0" encoding="utf-8"?>
-<p:notes xmlns:a="http://schemas.openxmlformats.org/drawingml/2006/main" xmlns:r="http://schemas.openxmlformats.org/officeDocument/2006/relationships" xmlns:p="http://schemas.openxmlformats.org/presentationml/2006/main">
-  <p:cSld>
-    <p:spTree>
-      <p:nvGrpSpPr>
         <p:cNvPr id="1" name="">
           <a:extLst>
             <a:ext uri="{FF2B5EF4-FFF2-40B4-BE49-F238E27FC236}">
@@ -844,7 +762,7 @@
           <a:p>
             <a:fld id="{BFDD6F49-EBB7-4CCF-97A8-E526BB28BB69}" type="slidenum">
               <a:rPr lang="en-US" smtClean="0"/>
-              <a:t>11</a:t>
+              <a:t>9</a:t>
             </a:fld>
             <a:endParaRPr lang="en-US" dirty="0"/>
           </a:p>
@@ -854,6 +772,90 @@
     <p:extLst>
       <p:ext uri="{BB962C8B-B14F-4D97-AF65-F5344CB8AC3E}">
         <p14:creationId xmlns:p14="http://schemas.microsoft.com/office/powerpoint/2010/main" val="872429376"/>
+      </p:ext>
+    </p:extLst>
+  </p:cSld>
+  <p:clrMapOvr>
+    <a:masterClrMapping/>
+  </p:clrMapOvr>
+</p:notes>
+</file>
+
+<file path=ppt/notesSlides/notesSlide2.xml><?xml version="1.0" encoding="utf-8"?>
+<p:notes xmlns:a="http://schemas.openxmlformats.org/drawingml/2006/main" xmlns:r="http://schemas.openxmlformats.org/officeDocument/2006/relationships" xmlns:p="http://schemas.openxmlformats.org/presentationml/2006/main">
+  <p:cSld>
+    <p:spTree>
+      <p:nvGrpSpPr>
+        <p:cNvPr id="1" name=""/>
+        <p:cNvGrpSpPr/>
+        <p:nvPr/>
+      </p:nvGrpSpPr>
+      <p:grpSpPr>
+        <a:xfrm>
+          <a:off x="0" y="0"/>
+          <a:ext cx="0" cy="0"/>
+          <a:chOff x="0" y="0"/>
+          <a:chExt cx="0" cy="0"/>
+        </a:xfrm>
+      </p:grpSpPr>
+      <p:sp>
+        <p:nvSpPr>
+          <p:cNvPr id="2" name="Slide Image Placeholder 1"/>
+          <p:cNvSpPr>
+            <a:spLocks noGrp="1" noRot="1" noChangeAspect="1"/>
+          </p:cNvSpPr>
+          <p:nvPr>
+            <p:ph type="sldImg"/>
+          </p:nvPr>
+        </p:nvSpPr>
+        <p:spPr/>
+      </p:sp>
+      <p:sp>
+        <p:nvSpPr>
+          <p:cNvPr id="3" name="Notes Placeholder 2"/>
+          <p:cNvSpPr>
+            <a:spLocks noGrp="1"/>
+          </p:cNvSpPr>
+          <p:nvPr>
+            <p:ph type="body" idx="1"/>
+          </p:nvPr>
+        </p:nvSpPr>
+        <p:spPr/>
+        <p:txBody>
+          <a:bodyPr/>
+          <a:lstStyle/>
+          <a:p>
+            <a:endParaRPr lang="en-IN" dirty="0"/>
+          </a:p>
+        </p:txBody>
+      </p:sp>
+      <p:sp>
+        <p:nvSpPr>
+          <p:cNvPr id="4" name="Slide Number Placeholder 3"/>
+          <p:cNvSpPr>
+            <a:spLocks noGrp="1"/>
+          </p:cNvSpPr>
+          <p:nvPr>
+            <p:ph type="sldNum" sz="quarter" idx="5"/>
+          </p:nvPr>
+        </p:nvSpPr>
+        <p:spPr/>
+        <p:txBody>
+          <a:bodyPr/>
+          <a:lstStyle/>
+          <a:p>
+            <a:fld id="{BFDD6F49-EBB7-4CCF-97A8-E526BB28BB69}" type="slidenum">
+              <a:rPr lang="en-US" smtClean="0"/>
+              <a:t>11</a:t>
+            </a:fld>
+            <a:endParaRPr lang="en-US" dirty="0"/>
+          </a:p>
+        </p:txBody>
+      </p:sp>
+    </p:spTree>
+    <p:extLst>
+      <p:ext uri="{BB962C8B-B14F-4D97-AF65-F5344CB8AC3E}">
+        <p14:creationId xmlns:p14="http://schemas.microsoft.com/office/powerpoint/2010/main" val="1484094776"/>
       </p:ext>
     </p:extLst>
   </p:cSld>
@@ -1086,7 +1088,7 @@
           <a:p>
             <a:fld id="{804512D9-A095-4355-9551-356CB2C0D09E}" type="datetime1">
               <a:rPr lang="en-US" smtClean="0"/>
-              <a:t>9/1/2026</a:t>
+              <a:t>9/2/2026</a:t>
             </a:fld>
             <a:endParaRPr lang="en-US" dirty="0"/>
           </a:p>
@@ -1269,7 +1271,7 @@
           <a:p>
             <a:fld id="{665DFBE8-81F4-46A1-BB38-C49D79C4F68D}" type="datetime1">
               <a:rPr lang="en-US" smtClean="0"/>
-              <a:t>9/1/2026</a:t>
+              <a:t>9/2/2026</a:t>
             </a:fld>
             <a:endParaRPr lang="en-US" dirty="0"/>
           </a:p>
@@ -1568,7 +1570,7 @@
           <a:p>
             <a:fld id="{665DFBE8-81F4-46A1-BB38-C49D79C4F68D}" type="datetime1">
               <a:rPr lang="en-US" smtClean="0"/>
-              <a:t>9/1/2026</a:t>
+              <a:t>9/2/2026</a:t>
             </a:fld>
             <a:endParaRPr lang="en-US" dirty="0"/>
           </a:p>
@@ -1935,7 +1937,7 @@
           <a:p>
             <a:fld id="{665DFBE8-81F4-46A1-BB38-C49D79C4F68D}" type="datetime1">
               <a:rPr lang="en-US" smtClean="0"/>
-              <a:t>9/1/2026</a:t>
+              <a:t>9/2/2026</a:t>
             </a:fld>
             <a:endParaRPr lang="en-US" dirty="0"/>
           </a:p>
@@ -2183,7 +2185,7 @@
           <a:p>
             <a:fld id="{665DFBE8-81F4-46A1-BB38-C49D79C4F68D}" type="datetime1">
               <a:rPr lang="en-US" smtClean="0"/>
-              <a:t>9/1/2026</a:t>
+              <a:t>9/2/2026</a:t>
             </a:fld>
             <a:endParaRPr lang="en-US" dirty="0"/>
           </a:p>
@@ -2464,7 +2466,7 @@
           <a:p>
             <a:fld id="{665DFBE8-81F4-46A1-BB38-C49D79C4F68D}" type="datetime1">
               <a:rPr lang="en-US" smtClean="0"/>
-              <a:t>9/1/2026</a:t>
+              <a:t>9/2/2026</a:t>
             </a:fld>
             <a:endParaRPr lang="en-US" dirty="0"/>
           </a:p>
@@ -2873,7 +2875,7 @@
           <a:p>
             <a:fld id="{665DFBE8-81F4-46A1-BB38-C49D79C4F68D}" type="datetime1">
               <a:rPr lang="en-US" smtClean="0"/>
-              <a:t>9/1/2026</a:t>
+              <a:t>9/2/2026</a:t>
             </a:fld>
             <a:endParaRPr lang="en-US" dirty="0"/>
           </a:p>
@@ -3135,7 +3137,7 @@
           <a:p>
             <a:fld id="{665DFBE8-81F4-46A1-BB38-C49D79C4F68D}" type="datetime1">
               <a:rPr lang="en-US" smtClean="0"/>
-              <a:t>9/1/2026</a:t>
+              <a:t>9/2/2026</a:t>
             </a:fld>
             <a:endParaRPr lang="en-US" dirty="0"/>
           </a:p>
@@ -3478,7 +3480,7 @@
           <a:p>
             <a:fld id="{665DFBE8-81F4-46A1-BB38-C49D79C4F68D}" type="datetime1">
               <a:rPr lang="en-US" smtClean="0"/>
-              <a:t>9/1/2026</a:t>
+              <a:t>9/2/2026</a:t>
             </a:fld>
             <a:endParaRPr lang="en-US" dirty="0"/>
           </a:p>
@@ -3703,7 +3705,7 @@
           <a:p>
             <a:fld id="{665DFBE8-81F4-46A1-BB38-C49D79C4F68D}" type="datetime1">
               <a:rPr lang="en-US" smtClean="0"/>
-              <a:t>9/1/2026</a:t>
+              <a:t>9/2/2026</a:t>
             </a:fld>
             <a:endParaRPr lang="en-US" dirty="0"/>
           </a:p>
@@ -4032,7 +4034,7 @@
           <a:p>
             <a:fld id="{665DFBE8-81F4-46A1-BB38-C49D79C4F68D}" type="datetime1">
               <a:rPr lang="en-US" smtClean="0"/>
-              <a:t>9/1/2026</a:t>
+              <a:t>9/2/2026</a:t>
             </a:fld>
             <a:endParaRPr lang="en-US" dirty="0"/>
           </a:p>
@@ -4259,7 +4261,7 @@
           <a:p>
             <a:fld id="{665DFBE8-81F4-46A1-BB38-C49D79C4F68D}" type="datetime1">
               <a:rPr lang="en-US" smtClean="0"/>
-              <a:t>9/1/2026</a:t>
+              <a:t>9/2/2026</a:t>
             </a:fld>
             <a:endParaRPr lang="en-US" dirty="0"/>
           </a:p>
@@ -4574,7 +4576,7 @@
           <a:p>
             <a:fld id="{665DFBE8-81F4-46A1-BB38-C49D79C4F68D}" type="datetime1">
               <a:rPr lang="en-US" smtClean="0"/>
-              <a:t>9/1/2026</a:t>
+              <a:t>9/2/2026</a:t>
             </a:fld>
             <a:endParaRPr lang="en-US" dirty="0"/>
           </a:p>
@@ -4919,7 +4921,7 @@
           <a:p>
             <a:fld id="{DB6CF73C-93E7-489E-AE2B-E246A7DB6D93}" type="datetime1">
               <a:rPr lang="en-US" smtClean="0"/>
-              <a:t>9/1/2026</a:t>
+              <a:t>9/2/2026</a:t>
             </a:fld>
             <a:endParaRPr lang="en-US" dirty="0"/>
           </a:p>
@@ -5154,7 +5156,7 @@
           <a:p>
             <a:fld id="{665DFBE8-81F4-46A1-BB38-C49D79C4F68D}" type="datetime1">
               <a:rPr lang="en-US" smtClean="0"/>
-              <a:t>9/1/2026</a:t>
+              <a:t>9/2/2026</a:t>
             </a:fld>
             <a:endParaRPr lang="en-US" dirty="0"/>
           </a:p>
@@ -5541,7 +5543,7 @@
           <a:p>
             <a:fld id="{665DFBE8-81F4-46A1-BB38-C49D79C4F68D}" type="datetime1">
               <a:rPr lang="en-US" smtClean="0"/>
-              <a:t>9/1/2026</a:t>
+              <a:t>9/2/2026</a:t>
             </a:fld>
             <a:endParaRPr lang="en-US" dirty="0"/>
           </a:p>
@@ -6083,7 +6085,7 @@
           <a:p>
             <a:fld id="{6F57FA73-4BE2-4237-90E8-28123CE1B9FA}" type="datetime1">
               <a:rPr lang="en-US" smtClean="0"/>
-              <a:t>9/1/2026</a:t>
+              <a:t>9/2/2026</a:t>
             </a:fld>
             <a:endParaRPr lang="en-US" dirty="0"/>
           </a:p>
@@ -6224,7 +6226,7 @@
           <a:p>
             <a:fld id="{665DFBE8-81F4-46A1-BB38-C49D79C4F68D}" type="datetime1">
               <a:rPr lang="en-US" smtClean="0"/>
-              <a:t>9/1/2026</a:t>
+              <a:t>9/2/2026</a:t>
             </a:fld>
             <a:endParaRPr lang="en-US" dirty="0"/>
           </a:p>
@@ -6447,7 +6449,7 @@
           <a:p>
             <a:fld id="{F57D2C4C-3CEB-4A3F-A850-2A701BAB5B4F}" type="datetime1">
               <a:rPr lang="en-US" smtClean="0"/>
-              <a:t>9/1/2026</a:t>
+              <a:t>9/2/2026</a:t>
             </a:fld>
             <a:endParaRPr lang="en-US" dirty="0"/>
           </a:p>
@@ -6768,7 +6770,7 @@
           <a:p>
             <a:fld id="{665DFBE8-81F4-46A1-BB38-C49D79C4F68D}" type="datetime1">
               <a:rPr lang="en-US" smtClean="0"/>
-              <a:t>9/1/2026</a:t>
+              <a:t>9/2/2026</a:t>
             </a:fld>
             <a:endParaRPr lang="en-US" dirty="0"/>
           </a:p>
@@ -7103,7 +7105,7 @@
           <a:p>
             <a:fld id="{BE4564F8-E916-4EFF-887D-D1E1BBF6454B}" type="datetime1">
               <a:rPr lang="en-US" smtClean="0"/>
-              <a:t>9/1/2026</a:t>
+              <a:t>9/2/2026</a:t>
             </a:fld>
             <a:endParaRPr lang="en-US" dirty="0"/>
           </a:p>
@@ -7455,7 +7457,7 @@
           <a:p>
             <a:fld id="{D5E635FD-01E5-4F9B-B7E3-4E8E4D553502}" type="datetime1">
               <a:rPr lang="en-US" smtClean="0"/>
-              <a:t>9/1/2026</a:t>
+              <a:t>9/2/2026</a:t>
             </a:fld>
             <a:endParaRPr lang="en-US" dirty="0"/>
           </a:p>
@@ -7782,7 +7784,7 @@
           <a:p>
             <a:fld id="{665DFBE8-81F4-46A1-BB38-C49D79C4F68D}" type="datetime1">
               <a:rPr lang="en-US" smtClean="0"/>
-              <a:t>9/1/2026</a:t>
+              <a:t>9/2/2026</a:t>
             </a:fld>
             <a:endParaRPr lang="en-US" dirty="0"/>
           </a:p>
@@ -7989,7 +7991,7 @@
           <a:p>
             <a:fld id="{175A1B29-DFBD-4673-8328-3ED6619AAB50}" type="datetime1">
               <a:rPr lang="en-US" smtClean="0"/>
-              <a:t>9/1/2026</a:t>
+              <a:t>9/2/2026</a:t>
             </a:fld>
             <a:endParaRPr lang="en-US" dirty="0"/>
           </a:p>
@@ -8284,7 +8286,7 @@
           <a:p>
             <a:fld id="{E7C9592F-4A0D-4D12-B47E-4A7D843B26AD}" type="datetime1">
               <a:rPr lang="en-US" smtClean="0"/>
-              <a:t>9/1/2026</a:t>
+              <a:t>9/2/2026</a:t>
             </a:fld>
             <a:endParaRPr lang="en-US" dirty="0"/>
           </a:p>
@@ -8368,253 +8370,6 @@
     <p:extLst>
       <p:ext uri="{BB962C8B-B14F-4D97-AF65-F5344CB8AC3E}">
         <p14:creationId xmlns:p14="http://schemas.microsoft.com/office/powerpoint/2010/main" val="4124828173"/>
-      </p:ext>
-    </p:extLst>
-  </p:cSld>
-  <p:clrMapOvr>
-    <a:masterClrMapping/>
-  </p:clrMapOvr>
-</p:sldLayout>
-</file>
-
-<file path=ppt/slideLayouts/slideLayout32.xml><?xml version="1.0" encoding="utf-8"?>
-<p:sldLayout xmlns:a="http://schemas.openxmlformats.org/drawingml/2006/main" xmlns:r="http://schemas.openxmlformats.org/officeDocument/2006/relationships" xmlns:p="http://schemas.openxmlformats.org/presentationml/2006/main" showMasterSp="0">
-  <p:cSld name="1_Conclusion 2">
-    <p:spTree>
-      <p:nvGrpSpPr>
-        <p:cNvPr id="1" name=""/>
-        <p:cNvGrpSpPr/>
-        <p:nvPr/>
-      </p:nvGrpSpPr>
-      <p:grpSpPr>
-        <a:xfrm>
-          <a:off x="0" y="0"/>
-          <a:ext cx="0" cy="0"/>
-          <a:chOff x="0" y="0"/>
-          <a:chExt cx="0" cy="0"/>
-        </a:xfrm>
-      </p:grpSpPr>
-      <p:sp>
-        <p:nvSpPr>
-          <p:cNvPr id="2" name="Title 1">
-            <a:extLst>
-              <a:ext uri="{FF2B5EF4-FFF2-40B4-BE49-F238E27FC236}">
-                <a16:creationId xmlns:a16="http://schemas.microsoft.com/office/drawing/2014/main" id="{BC7433D9-FD02-59E2-0F81-A0B7201D2DA0}"/>
-              </a:ext>
-            </a:extLst>
-          </p:cNvPr>
-          <p:cNvSpPr>
-            <a:spLocks noGrp="1"/>
-          </p:cNvSpPr>
-          <p:nvPr>
-            <p:ph type="title"/>
-          </p:nvPr>
-        </p:nvSpPr>
-        <p:spPr>
-          <a:xfrm>
-            <a:off x="301752" y="762000"/>
-            <a:ext cx="6095999" cy="1454506"/>
-          </a:xfrm>
-        </p:spPr>
-        <p:txBody>
-          <a:bodyPr anchor="t">
-            <a:normAutofit/>
-          </a:bodyPr>
-          <a:lstStyle>
-            <a:lvl1pPr>
-              <a:defRPr sz="5400">
-                <a:solidFill>
-                  <a:schemeClr val="tx1"/>
-                </a:solidFill>
-              </a:defRPr>
-            </a:lvl1pPr>
-          </a:lstStyle>
-          <a:p>
-            <a:r>
-              <a:rPr lang="en-GB"/>
-              <a:t>Click to edit Master title style</a:t>
-            </a:r>
-            <a:endParaRPr lang="en-US"/>
-          </a:p>
-        </p:txBody>
-      </p:sp>
-      <p:sp>
-        <p:nvSpPr>
-          <p:cNvPr id="3" name="Date Placeholder 2">
-            <a:extLst>
-              <a:ext uri="{FF2B5EF4-FFF2-40B4-BE49-F238E27FC236}">
-                <a16:creationId xmlns:a16="http://schemas.microsoft.com/office/drawing/2014/main" id="{7CAECC89-C65D-CAD6-3F7F-24F67D81DCF1}"/>
-              </a:ext>
-            </a:extLst>
-          </p:cNvPr>
-          <p:cNvSpPr>
-            <a:spLocks noGrp="1"/>
-          </p:cNvSpPr>
-          <p:nvPr>
-            <p:ph type="dt" sz="half" idx="15"/>
-          </p:nvPr>
-        </p:nvSpPr>
-        <p:spPr/>
-        <p:txBody>
-          <a:bodyPr/>
-          <a:lstStyle/>
-          <a:p>
-            <a:fld id="{1ABC5762-7F5E-4C8D-B27D-8990A68BB18F}" type="datetime1">
-              <a:rPr lang="en-US" smtClean="0"/>
-              <a:t>9/1/2026</a:t>
-            </a:fld>
-            <a:endParaRPr lang="en-US" dirty="0"/>
-          </a:p>
-        </p:txBody>
-      </p:sp>
-      <p:sp>
-        <p:nvSpPr>
-          <p:cNvPr id="8" name="Footer Placeholder 7">
-            <a:extLst>
-              <a:ext uri="{FF2B5EF4-FFF2-40B4-BE49-F238E27FC236}">
-                <a16:creationId xmlns:a16="http://schemas.microsoft.com/office/drawing/2014/main" id="{F664FAF8-D2CD-617D-EEE4-AFE7E979984A}"/>
-              </a:ext>
-            </a:extLst>
-          </p:cNvPr>
-          <p:cNvSpPr>
-            <a:spLocks noGrp="1"/>
-          </p:cNvSpPr>
-          <p:nvPr>
-            <p:ph type="ftr" sz="quarter" idx="16"/>
-          </p:nvPr>
-        </p:nvSpPr>
-        <p:spPr/>
-        <p:txBody>
-          <a:bodyPr/>
-          <a:lstStyle/>
-          <a:p>
-            <a:r>
-              <a:rPr lang="en-US"/>
-              <a:t>Sample Footer Text</a:t>
-            </a:r>
-            <a:endParaRPr lang="en-US" dirty="0"/>
-          </a:p>
-        </p:txBody>
-      </p:sp>
-      <p:sp>
-        <p:nvSpPr>
-          <p:cNvPr id="9" name="Slide Number Placeholder 8">
-            <a:extLst>
-              <a:ext uri="{FF2B5EF4-FFF2-40B4-BE49-F238E27FC236}">
-                <a16:creationId xmlns:a16="http://schemas.microsoft.com/office/drawing/2014/main" id="{B0DB779D-8A81-935C-F850-6C0DCAD5E6D1}"/>
-              </a:ext>
-            </a:extLst>
-          </p:cNvPr>
-          <p:cNvSpPr>
-            <a:spLocks noGrp="1"/>
-          </p:cNvSpPr>
-          <p:nvPr>
-            <p:ph type="sldNum" sz="quarter" idx="17"/>
-          </p:nvPr>
-        </p:nvSpPr>
-        <p:spPr/>
-        <p:txBody>
-          <a:bodyPr/>
-          <a:lstStyle/>
-          <a:p>
-            <a:fld id="{CC057153-B650-4DEB-B370-79DDCFDCE934}" type="slidenum">
-              <a:rPr lang="en-US" smtClean="0"/>
-              <a:t>‹#›</a:t>
-            </a:fld>
-            <a:endParaRPr lang="en-US" dirty="0"/>
-          </a:p>
-        </p:txBody>
-      </p:sp>
-      <p:sp>
-        <p:nvSpPr>
-          <p:cNvPr id="7" name="Content Placeholder 6">
-            <a:extLst>
-              <a:ext uri="{FF2B5EF4-FFF2-40B4-BE49-F238E27FC236}">
-                <a16:creationId xmlns:a16="http://schemas.microsoft.com/office/drawing/2014/main" id="{053FFEDA-E57B-DF13-2394-A1514E15F85A}"/>
-              </a:ext>
-            </a:extLst>
-          </p:cNvPr>
-          <p:cNvSpPr>
-            <a:spLocks noGrp="1"/>
-          </p:cNvSpPr>
-          <p:nvPr>
-            <p:ph sz="quarter" idx="14"/>
-          </p:nvPr>
-        </p:nvSpPr>
-        <p:spPr>
-          <a:xfrm>
-            <a:off x="7620000" y="3337560"/>
-            <a:ext cx="3595171" cy="2828581"/>
-          </a:xfrm>
-        </p:spPr>
-        <p:txBody>
-          <a:bodyPr vert="horz" lIns="91440" tIns="45720" rIns="91440" bIns="45720" rtlCol="0">
-            <a:normAutofit/>
-          </a:bodyPr>
-          <a:lstStyle>
-            <a:lvl1pPr marL="0" indent="0">
-              <a:buNone/>
-              <a:defRPr lang="en-US" sz="1800" dirty="0"/>
-            </a:lvl1pPr>
-            <a:lvl2pPr marL="228600" indent="0">
-              <a:buNone/>
-              <a:defRPr lang="en-US" sz="1400" dirty="0"/>
-            </a:lvl2pPr>
-            <a:lvl3pPr marL="457200" indent="0">
-              <a:buNone/>
-              <a:defRPr lang="en-US" sz="1200" dirty="0"/>
-            </a:lvl3pPr>
-            <a:lvl4pPr marL="685800" indent="0">
-              <a:buNone/>
-              <a:defRPr lang="en-US" sz="1100" dirty="0"/>
-            </a:lvl4pPr>
-            <a:lvl5pPr marL="914400" indent="0">
-              <a:buNone/>
-              <a:defRPr lang="en-US" sz="1050" dirty="0"/>
-            </a:lvl5pPr>
-          </a:lstStyle>
-          <a:p>
-            <a:pPr lvl="0"/>
-            <a:r>
-              <a:rPr lang="en-GB"/>
-              <a:t>Click to edit Master text styles</a:t>
-            </a:r>
-          </a:p>
-          <a:p>
-            <a:pPr lvl="1"/>
-            <a:r>
-              <a:rPr lang="en-GB"/>
-              <a:t>Second level</a:t>
-            </a:r>
-          </a:p>
-          <a:p>
-            <a:pPr lvl="2"/>
-            <a:r>
-              <a:rPr lang="en-GB"/>
-              <a:t>Third level</a:t>
-            </a:r>
-          </a:p>
-          <a:p>
-            <a:pPr lvl="3"/>
-            <a:r>
-              <a:rPr lang="en-GB"/>
-              <a:t>Fourth level</a:t>
-            </a:r>
-          </a:p>
-          <a:p>
-            <a:pPr lvl="4"/>
-            <a:r>
-              <a:rPr lang="en-GB"/>
-              <a:t>Fifth level</a:t>
-            </a:r>
-            <a:endParaRPr lang="en-US"/>
-          </a:p>
-        </p:txBody>
-      </p:sp>
-    </p:spTree>
-    <p:extLst>
-      <p:ext uri="{BB962C8B-B14F-4D97-AF65-F5344CB8AC3E}">
-        <p14:creationId xmlns:p14="http://schemas.microsoft.com/office/powerpoint/2010/main" val="991148535"/>
       </p:ext>
     </p:extLst>
   </p:cSld>
@@ -8876,7 +8631,7 @@
           <a:p>
             <a:fld id="{175A1B29-DFBD-4673-8328-3ED6619AAB50}" type="datetime1">
               <a:rPr lang="en-US" smtClean="0"/>
-              <a:t>9/1/2026</a:t>
+              <a:t>9/2/2026</a:t>
             </a:fld>
             <a:endParaRPr lang="en-US" dirty="0"/>
           </a:p>
@@ -9123,7 +8878,7 @@
             <a:fld id="{BD69ADDC-FB37-4BD0-807F-2EC90205924B}" type="datetime1">
               <a:rPr lang="en-US" smtClean="0"/>
               <a:pPr/>
-              <a:t>9/1/2026</a:t>
+              <a:t>9/2/2026</a:t>
             </a:fld>
             <a:endParaRPr lang="en-US" dirty="0"/>
           </a:p>
@@ -9360,7 +9115,7 @@
           <a:p>
             <a:fld id="{B75827B4-FD33-43BF-9F9D-5FEB6B504CD5}" type="datetime1">
               <a:rPr lang="en-US" smtClean="0"/>
-              <a:t>9/1/2026</a:t>
+              <a:t>9/2/2026</a:t>
             </a:fld>
             <a:endParaRPr lang="en-US" dirty="0"/>
           </a:p>
@@ -9760,7 +9515,7 @@
           <a:p>
             <a:fld id="{665DFBE8-81F4-46A1-BB38-C49D79C4F68D}" type="datetime1">
               <a:rPr lang="en-US" smtClean="0"/>
-              <a:t>9/1/2026</a:t>
+              <a:t>9/2/2026</a:t>
             </a:fld>
             <a:endParaRPr lang="en-US" dirty="0"/>
           </a:p>
@@ -10122,7 +9877,7 @@
           <a:p>
             <a:fld id="{665DFBE8-81F4-46A1-BB38-C49D79C4F68D}" type="datetime1">
               <a:rPr lang="en-US" smtClean="0"/>
-              <a:t>9/1/2026</a:t>
+              <a:t>9/2/2026</a:t>
             </a:fld>
             <a:endParaRPr lang="en-US" dirty="0"/>
           </a:p>
@@ -10466,7 +10221,7 @@
           <a:p>
             <a:fld id="{1BA0B4E8-F389-4DD5-B3EC-37E88D1AD78F}" type="datetime1">
               <a:rPr lang="en-US" smtClean="0"/>
-              <a:t>9/1/2026</a:t>
+              <a:t>9/2/2026</a:t>
             </a:fld>
             <a:endParaRPr lang="en-US" dirty="0"/>
           </a:p>
@@ -10841,7 +10596,7 @@
           <a:p>
             <a:fld id="{665DFBE8-81F4-46A1-BB38-C49D79C4F68D}" type="datetime1">
               <a:rPr lang="en-US" smtClean="0"/>
-              <a:t>9/1/2026</a:t>
+              <a:t>9/2/2026</a:t>
             </a:fld>
             <a:endParaRPr lang="en-US" dirty="0"/>
           </a:p>
@@ -10932,7 +10687,6 @@
     <p:sldLayoutId id="2147483941" r:id="rId29"/>
     <p:sldLayoutId id="2147483942" r:id="rId30"/>
     <p:sldLayoutId id="2147483943" r:id="rId31"/>
-    <p:sldLayoutId id="2147483944" r:id="rId32"/>
   </p:sldLayoutIdLst>
   <p:hf sldNum="0" hdr="0" ftr="0" dt="0"/>
   <p:txStyles>
@@ -11470,6 +11224,724 @@
           <a:chExt cx="0" cy="0"/>
         </a:xfrm>
       </p:grpSpPr>
+      <p:sp>
+        <p:nvSpPr>
+          <p:cNvPr id="5" name="TextBox 4">
+            <a:extLst>
+              <a:ext uri="{FF2B5EF4-FFF2-40B4-BE49-F238E27FC236}">
+                <a16:creationId xmlns:a16="http://schemas.microsoft.com/office/drawing/2014/main" id="{6C2965E9-3FFF-1605-050F-1B86DB466A81}"/>
+              </a:ext>
+            </a:extLst>
+          </p:cNvPr>
+          <p:cNvSpPr txBox="1"/>
+          <p:nvPr/>
+        </p:nvSpPr>
+        <p:spPr>
+          <a:xfrm>
+            <a:off x="-466166" y="527126"/>
+            <a:ext cx="5572461" cy="400110"/>
+          </a:xfrm>
+          <a:prstGeom prst="rect">
+            <a:avLst/>
+          </a:prstGeom>
+          <a:noFill/>
+        </p:spPr>
+        <p:txBody>
+          <a:bodyPr wrap="square" rtlCol="0">
+            <a:spAutoFit/>
+          </a:bodyPr>
+          <a:lstStyle/>
+          <a:p>
+            <a:pPr algn="ctr"/>
+            <a:r>
+              <a:rPr lang="en-IN" sz="2000" dirty="0"/>
+              <a:t>PR-AUC (Precision Recall AUC)</a:t>
+            </a:r>
+          </a:p>
+        </p:txBody>
+      </p:sp>
+      <p:sp>
+        <p:nvSpPr>
+          <p:cNvPr id="2" name="TextBox 1">
+            <a:extLst>
+              <a:ext uri="{FF2B5EF4-FFF2-40B4-BE49-F238E27FC236}">
+                <a16:creationId xmlns:a16="http://schemas.microsoft.com/office/drawing/2014/main" id="{0B27E937-98C3-4063-22C5-AECAE92CE6E0}"/>
+              </a:ext>
+            </a:extLst>
+          </p:cNvPr>
+          <p:cNvSpPr txBox="1"/>
+          <p:nvPr/>
+        </p:nvSpPr>
+        <p:spPr>
+          <a:xfrm>
+            <a:off x="419100" y="1366221"/>
+            <a:ext cx="11353800" cy="1885260"/>
+          </a:xfrm>
+          <a:prstGeom prst="rect">
+            <a:avLst/>
+          </a:prstGeom>
+          <a:noFill/>
+        </p:spPr>
+        <p:txBody>
+          <a:bodyPr wrap="square" rtlCol="0">
+            <a:spAutoFit/>
+          </a:bodyPr>
+          <a:lstStyle/>
+          <a:p>
+            <a:pPr marL="342900" indent="-342900">
+              <a:lnSpc>
+                <a:spcPct val="150000"/>
+              </a:lnSpc>
+              <a:buFont typeface="+mj-lt"/>
+              <a:buAutoNum type="arabicPeriod"/>
+            </a:pPr>
+            <a:r>
+              <a:rPr lang="en-IN" sz="2000" dirty="0"/>
+              <a:t>PR-AUC is much more reliable than standard accuracy</a:t>
+            </a:r>
+          </a:p>
+          <a:p>
+            <a:pPr marL="342900" indent="-342900">
+              <a:lnSpc>
+                <a:spcPct val="150000"/>
+              </a:lnSpc>
+              <a:buFont typeface="+mj-lt"/>
+              <a:buAutoNum type="arabicPeriod"/>
+            </a:pPr>
+            <a:r>
+              <a:rPr lang="en-IN" sz="2000" dirty="0"/>
+              <a:t>This occurs due to the massive class imbalance, which causes unreliability</a:t>
+            </a:r>
+          </a:p>
+          <a:p>
+            <a:pPr marL="342900" indent="-342900">
+              <a:lnSpc>
+                <a:spcPct val="150000"/>
+              </a:lnSpc>
+              <a:buFont typeface="+mj-lt"/>
+              <a:buAutoNum type="arabicPeriod"/>
+            </a:pPr>
+            <a:r>
+              <a:rPr lang="en-IN" sz="2000" dirty="0"/>
+              <a:t>PR-AUC heavily penalizes false positive cases, which helps the model understand and adapt to the dataset better.</a:t>
+            </a:r>
+          </a:p>
+        </p:txBody>
+      </p:sp>
+      <p:sp>
+        <p:nvSpPr>
+          <p:cNvPr id="6" name="TextBox 5">
+            <a:extLst>
+              <a:ext uri="{FF2B5EF4-FFF2-40B4-BE49-F238E27FC236}">
+                <a16:creationId xmlns:a16="http://schemas.microsoft.com/office/drawing/2014/main" id="{B4D10B8A-C1AF-1FBB-2F0C-3DE63BDDC1AF}"/>
+              </a:ext>
+            </a:extLst>
+          </p:cNvPr>
+          <p:cNvSpPr txBox="1"/>
+          <p:nvPr/>
+        </p:nvSpPr>
+        <p:spPr>
+          <a:xfrm>
+            <a:off x="-808626" y="3498039"/>
+            <a:ext cx="5572461" cy="400110"/>
+          </a:xfrm>
+          <a:prstGeom prst="rect">
+            <a:avLst/>
+          </a:prstGeom>
+          <a:noFill/>
+        </p:spPr>
+        <p:txBody>
+          <a:bodyPr wrap="square" rtlCol="0">
+            <a:spAutoFit/>
+          </a:bodyPr>
+          <a:lstStyle/>
+          <a:p>
+            <a:pPr algn="ctr"/>
+            <a:r>
+              <a:rPr lang="en-IN" sz="2000" dirty="0"/>
+              <a:t>Temporal Test Train Split</a:t>
+            </a:r>
+          </a:p>
+        </p:txBody>
+      </p:sp>
+      <p:sp>
+        <p:nvSpPr>
+          <p:cNvPr id="7" name="TextBox 6">
+            <a:extLst>
+              <a:ext uri="{FF2B5EF4-FFF2-40B4-BE49-F238E27FC236}">
+                <a16:creationId xmlns:a16="http://schemas.microsoft.com/office/drawing/2014/main" id="{188B7EFB-038A-F2E0-E061-91EB29E52A86}"/>
+              </a:ext>
+            </a:extLst>
+          </p:cNvPr>
+          <p:cNvSpPr txBox="1"/>
+          <p:nvPr/>
+        </p:nvSpPr>
+        <p:spPr>
+          <a:xfrm>
+            <a:off x="399372" y="4197281"/>
+            <a:ext cx="11353800" cy="1423595"/>
+          </a:xfrm>
+          <a:prstGeom prst="rect">
+            <a:avLst/>
+          </a:prstGeom>
+          <a:noFill/>
+        </p:spPr>
+        <p:txBody>
+          <a:bodyPr wrap="square" rtlCol="0">
+            <a:spAutoFit/>
+          </a:bodyPr>
+          <a:lstStyle/>
+          <a:p>
+            <a:pPr>
+              <a:lnSpc>
+                <a:spcPct val="150000"/>
+              </a:lnSpc>
+            </a:pPr>
+            <a:r>
+              <a:rPr lang="en-IN" sz="2000" dirty="0"/>
+              <a:t>Preventing data leakages through using only 70% of the dataset during testing/training, which prevents the model from hallucinating and causing discrepancies through picking future, unavailable values from the dataset.</a:t>
+            </a:r>
+          </a:p>
+        </p:txBody>
+      </p:sp>
+    </p:spTree>
+    <p:extLst>
+      <p:ext uri="{BB962C8B-B14F-4D97-AF65-F5344CB8AC3E}">
+        <p14:creationId xmlns:p14="http://schemas.microsoft.com/office/powerpoint/2010/main" val="2047902027"/>
+      </p:ext>
+    </p:extLst>
+  </p:cSld>
+  <p:clrMapOvr>
+    <a:masterClrMapping/>
+  </p:clrMapOvr>
+  <p:transition spd="slow">
+    <p:wipe/>
+  </p:transition>
+  <p:timing>
+    <p:tnLst>
+      <p:par>
+        <p:cTn id="1" dur="indefinite" restart="never" nodeType="tmRoot">
+          <p:childTnLst>
+            <p:seq concurrent="1" nextAc="seek">
+              <p:cTn id="2" dur="indefinite" nodeType="mainSeq">
+                <p:childTnLst>
+                  <p:par>
+                    <p:cTn id="3" fill="hold">
+                      <p:stCondLst>
+                        <p:cond delay="indefinite"/>
+                      </p:stCondLst>
+                      <p:childTnLst>
+                        <p:par>
+                          <p:cTn id="4" fill="hold">
+                            <p:stCondLst>
+                              <p:cond delay="0"/>
+                            </p:stCondLst>
+                            <p:childTnLst>
+                              <p:par>
+                                <p:cTn id="5" presetID="10" presetClass="entr" presetSubtype="0" fill="hold" grpId="0" nodeType="clickEffect">
+                                  <p:stCondLst>
+                                    <p:cond delay="0"/>
+                                  </p:stCondLst>
+                                  <p:childTnLst>
+                                    <p:set>
+                                      <p:cBhvr>
+                                        <p:cTn id="6" dur="1" fill="hold">
+                                          <p:stCondLst>
+                                            <p:cond delay="0"/>
+                                          </p:stCondLst>
+                                        </p:cTn>
+                                        <p:tgtEl>
+                                          <p:spTgt spid="5"/>
+                                        </p:tgtEl>
+                                        <p:attrNameLst>
+                                          <p:attrName>style.visibility</p:attrName>
+                                        </p:attrNameLst>
+                                      </p:cBhvr>
+                                      <p:to>
+                                        <p:strVal val="visible"/>
+                                      </p:to>
+                                    </p:set>
+                                    <p:animEffect transition="in" filter="fade">
+                                      <p:cBhvr>
+                                        <p:cTn id="7" dur="500"/>
+                                        <p:tgtEl>
+                                          <p:spTgt spid="5"/>
+                                        </p:tgtEl>
+                                      </p:cBhvr>
+                                    </p:animEffect>
+                                  </p:childTnLst>
+                                </p:cTn>
+                              </p:par>
+                            </p:childTnLst>
+                          </p:cTn>
+                        </p:par>
+                      </p:childTnLst>
+                    </p:cTn>
+                  </p:par>
+                  <p:par>
+                    <p:cTn id="8" fill="hold">
+                      <p:stCondLst>
+                        <p:cond delay="indefinite"/>
+                      </p:stCondLst>
+                      <p:childTnLst>
+                        <p:par>
+                          <p:cTn id="9" fill="hold">
+                            <p:stCondLst>
+                              <p:cond delay="0"/>
+                            </p:stCondLst>
+                            <p:childTnLst>
+                              <p:par>
+                                <p:cTn id="10" presetID="10" presetClass="entr" presetSubtype="0" fill="hold" grpId="0" nodeType="clickEffect">
+                                  <p:stCondLst>
+                                    <p:cond delay="0"/>
+                                  </p:stCondLst>
+                                  <p:childTnLst>
+                                    <p:set>
+                                      <p:cBhvr>
+                                        <p:cTn id="11" dur="1" fill="hold">
+                                          <p:stCondLst>
+                                            <p:cond delay="0"/>
+                                          </p:stCondLst>
+                                        </p:cTn>
+                                        <p:tgtEl>
+                                          <p:spTgt spid="6"/>
+                                        </p:tgtEl>
+                                        <p:attrNameLst>
+                                          <p:attrName>style.visibility</p:attrName>
+                                        </p:attrNameLst>
+                                      </p:cBhvr>
+                                      <p:to>
+                                        <p:strVal val="visible"/>
+                                      </p:to>
+                                    </p:set>
+                                    <p:animEffect transition="in" filter="fade">
+                                      <p:cBhvr>
+                                        <p:cTn id="12" dur="500"/>
+                                        <p:tgtEl>
+                                          <p:spTgt spid="6"/>
+                                        </p:tgtEl>
+                                      </p:cBhvr>
+                                    </p:animEffect>
+                                  </p:childTnLst>
+                                </p:cTn>
+                              </p:par>
+                            </p:childTnLst>
+                          </p:cTn>
+                        </p:par>
+                      </p:childTnLst>
+                    </p:cTn>
+                  </p:par>
+                </p:childTnLst>
+              </p:cTn>
+              <p:prevCondLst>
+                <p:cond evt="onPrev" delay="0">
+                  <p:tgtEl>
+                    <p:sldTgt/>
+                  </p:tgtEl>
+                </p:cond>
+              </p:prevCondLst>
+              <p:nextCondLst>
+                <p:cond evt="onNext" delay="0">
+                  <p:tgtEl>
+                    <p:sldTgt/>
+                  </p:tgtEl>
+                </p:cond>
+              </p:nextCondLst>
+            </p:seq>
+          </p:childTnLst>
+        </p:cTn>
+      </p:par>
+    </p:tnLst>
+    <p:bldLst>
+      <p:bldP spid="5" grpId="0"/>
+      <p:bldP spid="6" grpId="0"/>
+    </p:bldLst>
+  </p:timing>
+</p:sld>
+</file>
+
+<file path=ppt/slides/slide11.xml><?xml version="1.0" encoding="utf-8"?>
+<p:sld xmlns:a="http://schemas.openxmlformats.org/drawingml/2006/main" xmlns:r="http://schemas.openxmlformats.org/officeDocument/2006/relationships" xmlns:p="http://schemas.openxmlformats.org/presentationml/2006/main">
+  <p:cSld>
+    <p:spTree>
+      <p:nvGrpSpPr>
+        <p:cNvPr id="1" name="">
+          <a:extLst>
+            <a:ext uri="{FF2B5EF4-FFF2-40B4-BE49-F238E27FC236}">
+              <a16:creationId xmlns:a16="http://schemas.microsoft.com/office/drawing/2014/main" id="{3B125584-6ECD-26B2-203F-1E090AE60C09}"/>
+            </a:ext>
+          </a:extLst>
+        </p:cNvPr>
+        <p:cNvGrpSpPr/>
+        <p:nvPr/>
+      </p:nvGrpSpPr>
+      <p:grpSpPr>
+        <a:xfrm>
+          <a:off x="0" y="0"/>
+          <a:ext cx="0" cy="0"/>
+          <a:chOff x="0" y="0"/>
+          <a:chExt cx="0" cy="0"/>
+        </a:xfrm>
+      </p:grpSpPr>
+      <p:sp>
+        <p:nvSpPr>
+          <p:cNvPr id="2" name="Title 1">
+            <a:extLst>
+              <a:ext uri="{FF2B5EF4-FFF2-40B4-BE49-F238E27FC236}">
+                <a16:creationId xmlns:a16="http://schemas.microsoft.com/office/drawing/2014/main" id="{79DC926F-5672-9EC4-DBC6-119361BDDE5D}"/>
+              </a:ext>
+            </a:extLst>
+          </p:cNvPr>
+          <p:cNvSpPr>
+            <a:spLocks noGrp="1"/>
+          </p:cNvSpPr>
+          <p:nvPr>
+            <p:ph type="title"/>
+          </p:nvPr>
+        </p:nvSpPr>
+        <p:spPr>
+          <a:xfrm>
+            <a:off x="2270125" y="990600"/>
+            <a:ext cx="9145588" cy="3630613"/>
+          </a:xfrm>
+        </p:spPr>
+        <p:txBody>
+          <a:bodyPr anchor="b"/>
+          <a:lstStyle/>
+          <a:p>
+            <a:r>
+              <a:rPr lang="en-US" dirty="0"/>
+              <a:t>Impact</a:t>
+            </a:r>
+          </a:p>
+        </p:txBody>
+      </p:sp>
+    </p:spTree>
+    <p:extLst>
+      <p:ext uri="{BB962C8B-B14F-4D97-AF65-F5344CB8AC3E}">
+        <p14:creationId xmlns:p14="http://schemas.microsoft.com/office/powerpoint/2010/main" val="1134254760"/>
+      </p:ext>
+    </p:extLst>
+  </p:cSld>
+  <p:clrMapOvr>
+    <a:masterClrMapping/>
+  </p:clrMapOvr>
+  <mc:AlternateContent xmlns:mc="http://schemas.openxmlformats.org/markup-compatibility/2006" xmlns:p159="http://schemas.microsoft.com/office/powerpoint/2015/09/main">
+    <mc:Choice Requires="p159">
+      <p:transition xmlns:p14="http://schemas.microsoft.com/office/powerpoint/2010/main" spd="slow" p14:dur="2000">
+        <p159:morph option="byObject"/>
+      </p:transition>
+    </mc:Choice>
+    <mc:Fallback xmlns="">
+      <p:transition spd="slow">
+        <p:fade/>
+      </p:transition>
+    </mc:Fallback>
+  </mc:AlternateContent>
+</p:sld>
+</file>
+
+<file path=ppt/slides/slide12.xml><?xml version="1.0" encoding="utf-8"?>
+<p:sld xmlns:a="http://schemas.openxmlformats.org/drawingml/2006/main" xmlns:r="http://schemas.openxmlformats.org/officeDocument/2006/relationships" xmlns:p="http://schemas.openxmlformats.org/presentationml/2006/main">
+  <p:cSld>
+    <p:spTree>
+      <p:nvGrpSpPr>
+        <p:cNvPr id="1" name=""/>
+        <p:cNvGrpSpPr/>
+        <p:nvPr/>
+      </p:nvGrpSpPr>
+      <p:grpSpPr>
+        <a:xfrm>
+          <a:off x="0" y="0"/>
+          <a:ext cx="0" cy="0"/>
+          <a:chOff x="0" y="0"/>
+          <a:chExt cx="0" cy="0"/>
+        </a:xfrm>
+      </p:grpSpPr>
+      <p:sp>
+        <p:nvSpPr>
+          <p:cNvPr id="4" name="Title 3">
+            <a:extLst>
+              <a:ext uri="{FF2B5EF4-FFF2-40B4-BE49-F238E27FC236}">
+                <a16:creationId xmlns:a16="http://schemas.microsoft.com/office/drawing/2014/main" id="{5751BC45-CAED-BB43-A297-009708D51D81}"/>
+              </a:ext>
+            </a:extLst>
+          </p:cNvPr>
+          <p:cNvSpPr>
+            <a:spLocks noGrp="1"/>
+          </p:cNvSpPr>
+          <p:nvPr>
+            <p:ph type="title"/>
+          </p:nvPr>
+        </p:nvSpPr>
+        <p:spPr/>
+        <p:txBody>
+          <a:bodyPr/>
+          <a:lstStyle/>
+          <a:p>
+            <a:r>
+              <a:rPr lang="en-US" dirty="0"/>
+              <a:t>Quote</a:t>
+            </a:r>
+          </a:p>
+        </p:txBody>
+      </p:sp>
+      <p:sp>
+        <p:nvSpPr>
+          <p:cNvPr id="6" name="Content Placeholder 5">
+            <a:extLst>
+              <a:ext uri="{FF2B5EF4-FFF2-40B4-BE49-F238E27FC236}">
+                <a16:creationId xmlns:a16="http://schemas.microsoft.com/office/drawing/2014/main" id="{062B897C-9D62-36E3-5DC1-154478A93ECF}"/>
+              </a:ext>
+            </a:extLst>
+          </p:cNvPr>
+          <p:cNvSpPr>
+            <a:spLocks noGrp="1"/>
+          </p:cNvSpPr>
+          <p:nvPr>
+            <p:ph sz="quarter" idx="13"/>
+          </p:nvPr>
+        </p:nvSpPr>
+        <p:spPr/>
+        <p:txBody>
+          <a:bodyPr/>
+          <a:lstStyle/>
+          <a:p>
+            <a:r>
+              <a:rPr lang="en-US" sz="8800" b="1" dirty="0"/>
+              <a:t>10 BILLION USD</a:t>
+            </a:r>
+          </a:p>
+        </p:txBody>
+      </p:sp>
+      <p:sp>
+        <p:nvSpPr>
+          <p:cNvPr id="5" name="Title 1">
+            <a:extLst>
+              <a:ext uri="{FF2B5EF4-FFF2-40B4-BE49-F238E27FC236}">
+                <a16:creationId xmlns:a16="http://schemas.microsoft.com/office/drawing/2014/main" id="{4B5C4C08-211C-4506-43A8-E826D07B32DC}"/>
+              </a:ext>
+            </a:extLst>
+          </p:cNvPr>
+          <p:cNvSpPr txBox="1">
+            <a:spLocks/>
+          </p:cNvSpPr>
+          <p:nvPr/>
+        </p:nvSpPr>
+        <p:spPr>
+          <a:xfrm>
+            <a:off x="970788" y="4489503"/>
+            <a:ext cx="10250424" cy="1933310"/>
+          </a:xfrm>
+          <a:prstGeom prst="rect">
+            <a:avLst/>
+          </a:prstGeom>
+        </p:spPr>
+        <p:txBody>
+          <a:bodyPr vert="horz" lIns="91440" tIns="45720" rIns="91440" bIns="45720" rtlCol="0" anchor="b">
+            <a:normAutofit/>
+          </a:bodyPr>
+          <a:lstStyle>
+            <a:lvl1pPr algn="l" defTabSz="914400" rtl="0" eaLnBrk="1" latinLnBrk="0" hangingPunct="1">
+              <a:lnSpc>
+                <a:spcPct val="85000"/>
+              </a:lnSpc>
+              <a:spcBef>
+                <a:spcPct val="0"/>
+              </a:spcBef>
+              <a:buNone/>
+              <a:defRPr sz="2800" b="0" kern="1200" spc="0" baseline="0">
+                <a:solidFill>
+                  <a:schemeClr val="tx1"/>
+                </a:solidFill>
+                <a:latin typeface="+mj-lt"/>
+                <a:ea typeface="+mj-ea"/>
+                <a:cs typeface="+mj-cs"/>
+              </a:defRPr>
+            </a:lvl1pPr>
+          </a:lstStyle>
+          <a:p>
+            <a:pPr algn="ctr"/>
+            <a:r>
+              <a:rPr lang="en-US" sz="2000" dirty="0"/>
+              <a:t>Is the money lost to electricity theft annually.</a:t>
+            </a:r>
+          </a:p>
+        </p:txBody>
+      </p:sp>
+    </p:spTree>
+    <p:extLst>
+      <p:ext uri="{BB962C8B-B14F-4D97-AF65-F5344CB8AC3E}">
+        <p14:creationId xmlns:p14="http://schemas.microsoft.com/office/powerpoint/2010/main" val="2949280008"/>
+      </p:ext>
+    </p:extLst>
+  </p:cSld>
+  <p:clrMapOvr>
+    <a:masterClrMapping/>
+  </p:clrMapOvr>
+</p:sld>
+</file>
+
+<file path=ppt/slides/slide13.xml><?xml version="1.0" encoding="utf-8"?>
+<p:sld xmlns:a="http://schemas.openxmlformats.org/drawingml/2006/main" xmlns:r="http://schemas.openxmlformats.org/officeDocument/2006/relationships" xmlns:p="http://schemas.openxmlformats.org/presentationml/2006/main">
+  <p:cSld>
+    <p:spTree>
+      <p:nvGrpSpPr>
+        <p:cNvPr id="1" name=""/>
+        <p:cNvGrpSpPr/>
+        <p:nvPr/>
+      </p:nvGrpSpPr>
+      <p:grpSpPr>
+        <a:xfrm>
+          <a:off x="0" y="0"/>
+          <a:ext cx="0" cy="0"/>
+          <a:chOff x="0" y="0"/>
+          <a:chExt cx="0" cy="0"/>
+        </a:xfrm>
+      </p:grpSpPr>
+      <p:sp>
+        <p:nvSpPr>
+          <p:cNvPr id="2" name="Title 1">
+            <a:extLst>
+              <a:ext uri="{FF2B5EF4-FFF2-40B4-BE49-F238E27FC236}">
+                <a16:creationId xmlns:a16="http://schemas.microsoft.com/office/drawing/2014/main" id="{2DBB3A6A-1BD8-8125-15E1-120A167C07FD}"/>
+              </a:ext>
+            </a:extLst>
+          </p:cNvPr>
+          <p:cNvSpPr>
+            <a:spLocks noGrp="1"/>
+          </p:cNvSpPr>
+          <p:nvPr>
+            <p:ph type="title"/>
+          </p:nvPr>
+        </p:nvSpPr>
+        <p:spPr/>
+        <p:txBody>
+          <a:bodyPr/>
+          <a:lstStyle/>
+          <a:p>
+            <a:endParaRPr lang="en-IN"/>
+          </a:p>
+        </p:txBody>
+      </p:sp>
+      <p:sp>
+        <p:nvSpPr>
+          <p:cNvPr id="3" name="Content Placeholder 2">
+            <a:extLst>
+              <a:ext uri="{FF2B5EF4-FFF2-40B4-BE49-F238E27FC236}">
+                <a16:creationId xmlns:a16="http://schemas.microsoft.com/office/drawing/2014/main" id="{75E74510-291B-9C5B-E362-F7709E2D36C2}"/>
+              </a:ext>
+            </a:extLst>
+          </p:cNvPr>
+          <p:cNvSpPr>
+            <a:spLocks noGrp="1"/>
+          </p:cNvSpPr>
+          <p:nvPr>
+            <p:ph sz="quarter" idx="13"/>
+          </p:nvPr>
+        </p:nvSpPr>
+        <p:spPr>
+          <a:xfrm>
+            <a:off x="419100" y="561268"/>
+            <a:ext cx="11353800" cy="5735465"/>
+          </a:xfrm>
+        </p:spPr>
+        <p:txBody>
+          <a:bodyPr/>
+          <a:lstStyle/>
+          <a:p>
+            <a:r>
+              <a:rPr lang="en-IN" sz="6000" b="1" dirty="0"/>
+              <a:t>42 THOUSAND ENTRIES</a:t>
+            </a:r>
+          </a:p>
+        </p:txBody>
+      </p:sp>
+      <p:sp>
+        <p:nvSpPr>
+          <p:cNvPr id="5" name="Title 1">
+            <a:extLst>
+              <a:ext uri="{FF2B5EF4-FFF2-40B4-BE49-F238E27FC236}">
+                <a16:creationId xmlns:a16="http://schemas.microsoft.com/office/drawing/2014/main" id="{D3F908AE-F2E0-BF65-87CE-8B663A551E35}"/>
+              </a:ext>
+            </a:extLst>
+          </p:cNvPr>
+          <p:cNvSpPr txBox="1">
+            <a:spLocks/>
+          </p:cNvSpPr>
+          <p:nvPr/>
+        </p:nvSpPr>
+        <p:spPr>
+          <a:xfrm>
+            <a:off x="970788" y="4489503"/>
+            <a:ext cx="10250424" cy="1933310"/>
+          </a:xfrm>
+          <a:prstGeom prst="rect">
+            <a:avLst/>
+          </a:prstGeom>
+        </p:spPr>
+        <p:txBody>
+          <a:bodyPr vert="horz" lIns="91440" tIns="45720" rIns="91440" bIns="45720" rtlCol="0" anchor="b">
+            <a:normAutofit/>
+          </a:bodyPr>
+          <a:lstStyle>
+            <a:lvl1pPr algn="l" defTabSz="914400" rtl="0" eaLnBrk="1" latinLnBrk="0" hangingPunct="1">
+              <a:lnSpc>
+                <a:spcPct val="85000"/>
+              </a:lnSpc>
+              <a:spcBef>
+                <a:spcPct val="0"/>
+              </a:spcBef>
+              <a:buNone/>
+              <a:defRPr sz="2800" b="0" kern="1200" spc="0" baseline="0">
+                <a:solidFill>
+                  <a:schemeClr val="tx1"/>
+                </a:solidFill>
+                <a:latin typeface="+mj-lt"/>
+                <a:ea typeface="+mj-ea"/>
+                <a:cs typeface="+mj-cs"/>
+              </a:defRPr>
+            </a:lvl1pPr>
+          </a:lstStyle>
+          <a:p>
+            <a:pPr algn="ctr"/>
+            <a:r>
+              <a:rPr lang="en-US" sz="2000" dirty="0"/>
+              <a:t>This amount can be expanded to more using data centers and high-powered systems, hence ensuring a system that relies lesser on human auditing and more on probabilistic risk.</a:t>
+            </a:r>
+          </a:p>
+        </p:txBody>
+      </p:sp>
+    </p:spTree>
+    <p:extLst>
+      <p:ext uri="{BB962C8B-B14F-4D97-AF65-F5344CB8AC3E}">
+        <p14:creationId xmlns:p14="http://schemas.microsoft.com/office/powerpoint/2010/main" val="2892958320"/>
+      </p:ext>
+    </p:extLst>
+  </p:cSld>
+  <p:clrMapOvr>
+    <a:masterClrMapping/>
+  </p:clrMapOvr>
+</p:sld>
+</file>
+
+<file path=ppt/slides/slide14.xml><?xml version="1.0" encoding="utf-8"?>
+<p:sld xmlns:a="http://schemas.openxmlformats.org/drawingml/2006/main" xmlns:r="http://schemas.openxmlformats.org/officeDocument/2006/relationships" xmlns:p="http://schemas.openxmlformats.org/presentationml/2006/main">
+  <p:cSld>
+    <p:spTree>
+      <p:nvGrpSpPr>
+        <p:cNvPr id="1" name=""/>
+        <p:cNvGrpSpPr/>
+        <p:nvPr/>
+      </p:nvGrpSpPr>
+      <p:grpSpPr>
+        <a:xfrm>
+          <a:off x="0" y="0"/>
+          <a:ext cx="0" cy="0"/>
+          <a:chOff x="0" y="0"/>
+          <a:chExt cx="0" cy="0"/>
+        </a:xfrm>
+      </p:grpSpPr>
       <p:graphicFrame>
         <p:nvGraphicFramePr>
           <p:cNvPr id="10" name="Table 9">
@@ -11691,7 +12163,7 @@
             <a:pPr algn="ctr"/>
             <a:r>
               <a:rPr lang="en-IN" sz="2400" dirty="0"/>
-              <a:t>Feasibility</a:t>
+              <a:t>Demo</a:t>
             </a:r>
           </a:p>
         </p:txBody>
@@ -11706,13 +12178,13 @@
   <p:clrMapOvr>
     <a:masterClrMapping/>
   </p:clrMapOvr>
-  <mc:AlternateContent xmlns:mc="http://schemas.openxmlformats.org/markup-compatibility/2006">
-    <mc:Choice xmlns:p159="http://schemas.microsoft.com/office/powerpoint/2015/09/main" Requires="p159">
+  <mc:AlternateContent xmlns:mc="http://schemas.openxmlformats.org/markup-compatibility/2006" xmlns:p159="http://schemas.microsoft.com/office/powerpoint/2015/09/main">
+    <mc:Choice Requires="p159">
       <p:transition xmlns:p14="http://schemas.microsoft.com/office/powerpoint/2010/main" spd="slow" p14:dur="2000">
         <p159:morph option="byObject"/>
       </p:transition>
     </mc:Choice>
-    <mc:Fallback>
+    <mc:Fallback xmlns="">
       <p:transition spd="slow">
         <p:fade/>
       </p:transition>
@@ -11721,89 +12193,7 @@
 </p:sld>
 </file>
 
-<file path=ppt/slides/slide11.xml><?xml version="1.0" encoding="utf-8"?>
-<p:sld xmlns:a="http://schemas.openxmlformats.org/drawingml/2006/main" xmlns:r="http://schemas.openxmlformats.org/officeDocument/2006/relationships" xmlns:p="http://schemas.openxmlformats.org/presentationml/2006/main">
-  <p:cSld>
-    <p:spTree>
-      <p:nvGrpSpPr>
-        <p:cNvPr id="1" name="">
-          <a:extLst>
-            <a:ext uri="{FF2B5EF4-FFF2-40B4-BE49-F238E27FC236}">
-              <a16:creationId xmlns:a16="http://schemas.microsoft.com/office/drawing/2014/main" id="{31939A51-383F-A923-EF58-5DBF06572BAB}"/>
-            </a:ext>
-          </a:extLst>
-        </p:cNvPr>
-        <p:cNvGrpSpPr/>
-        <p:nvPr/>
-      </p:nvGrpSpPr>
-      <p:grpSpPr>
-        <a:xfrm>
-          <a:off x="0" y="0"/>
-          <a:ext cx="0" cy="0"/>
-          <a:chOff x="0" y="0"/>
-          <a:chExt cx="0" cy="0"/>
-        </a:xfrm>
-      </p:grpSpPr>
-      <p:sp>
-        <p:nvSpPr>
-          <p:cNvPr id="2" name="Title 1">
-            <a:extLst>
-              <a:ext uri="{FF2B5EF4-FFF2-40B4-BE49-F238E27FC236}">
-                <a16:creationId xmlns:a16="http://schemas.microsoft.com/office/drawing/2014/main" id="{66840978-3BE8-579B-E29B-7BBF94DDA6AA}"/>
-              </a:ext>
-            </a:extLst>
-          </p:cNvPr>
-          <p:cNvSpPr>
-            <a:spLocks noGrp="1"/>
-          </p:cNvSpPr>
-          <p:nvPr>
-            <p:ph type="title"/>
-          </p:nvPr>
-        </p:nvSpPr>
-        <p:spPr>
-          <a:xfrm>
-            <a:off x="2270125" y="990600"/>
-            <a:ext cx="9145588" cy="3630613"/>
-          </a:xfrm>
-        </p:spPr>
-        <p:txBody>
-          <a:bodyPr anchor="b"/>
-          <a:lstStyle/>
-          <a:p>
-            <a:r>
-              <a:rPr lang="en-US" dirty="0"/>
-              <a:t>Technicality</a:t>
-            </a:r>
-            <a:endParaRPr lang="en-US" i="1" dirty="0"/>
-          </a:p>
-        </p:txBody>
-      </p:sp>
-    </p:spTree>
-    <p:extLst>
-      <p:ext uri="{BB962C8B-B14F-4D97-AF65-F5344CB8AC3E}">
-        <p14:creationId xmlns:p14="http://schemas.microsoft.com/office/powerpoint/2010/main" val="2875229419"/>
-      </p:ext>
-    </p:extLst>
-  </p:cSld>
-  <p:clrMapOvr>
-    <a:masterClrMapping/>
-  </p:clrMapOvr>
-  <mc:AlternateContent xmlns:mc="http://schemas.openxmlformats.org/markup-compatibility/2006">
-    <mc:Choice xmlns:p159="http://schemas.microsoft.com/office/powerpoint/2015/09/main" Requires="p159">
-      <p:transition xmlns:p14="http://schemas.microsoft.com/office/powerpoint/2010/main" spd="slow" p14:dur="2000">
-        <p159:morph option="byObject"/>
-      </p:transition>
-    </mc:Choice>
-    <mc:Fallback>
-      <p:transition spd="slow">
-        <p:fade/>
-      </p:transition>
-    </mc:Fallback>
-  </mc:AlternateContent>
-</p:sld>
-</file>
-
-<file path=ppt/slides/slide12.xml><?xml version="1.0" encoding="utf-8"?>
+<file path=ppt/slides/slide15.xml><?xml version="1.0" encoding="utf-8"?>
 <p:sld xmlns:a="http://schemas.openxmlformats.org/drawingml/2006/main" xmlns:r="http://schemas.openxmlformats.org/officeDocument/2006/relationships" xmlns:p="http://schemas.openxmlformats.org/presentationml/2006/main">
   <p:cSld>
     <p:spTree>
@@ -11820,373 +12210,12 @@
           <a:chExt cx="0" cy="0"/>
         </a:xfrm>
       </p:grpSpPr>
-      <mc:AlternateContent xmlns:mc="http://schemas.openxmlformats.org/markup-compatibility/2006">
-        <mc:Choice xmlns:a14="http://schemas.microsoft.com/office/drawing/2010/main" Requires="a14">
-          <p:sp>
-            <p:nvSpPr>
-              <p:cNvPr id="3" name="TextBox 2">
-                <a:extLst>
-                  <a:ext uri="{FF2B5EF4-FFF2-40B4-BE49-F238E27FC236}">
-                    <a16:creationId xmlns:a16="http://schemas.microsoft.com/office/drawing/2014/main" id="{BB8AD40B-1D57-3208-9D9E-2DC14CC77114}"/>
-                  </a:ext>
-                </a:extLst>
-              </p:cNvPr>
-              <p:cNvSpPr txBox="1"/>
-              <p:nvPr/>
-            </p:nvSpPr>
-            <p:spPr>
-              <a:xfrm>
-                <a:off x="4653104" y="3351004"/>
-                <a:ext cx="2885790" cy="687817"/>
-              </a:xfrm>
-              <a:prstGeom prst="rect">
-                <a:avLst/>
-              </a:prstGeom>
-              <a:noFill/>
-            </p:spPr>
-            <p:txBody>
-              <a:bodyPr wrap="none" lIns="0" tIns="0" rIns="0" bIns="0" rtlCol="0">
-                <a:spAutoFit/>
-              </a:bodyPr>
-              <a:lstStyle/>
-              <a:p>
-                <a14:m>
-                  <m:oMathPara xmlns:m="http://schemas.openxmlformats.org/officeDocument/2006/math">
-                    <m:oMath>
-                      <m:r>
-                        <m:rPr>
-                          <m:nor/>
-                        </m:rPr>
-                        <a:rPr lang="en-IN" sz="2400" b="0" i="0" smtClean="0">
-                          <a:latin typeface="Cambria Math" panose="02040503050406030204" pitchFamily="18" charset="0"/>
-                        </a:rPr>
-                        <m:t>Volatility: </m:t>
-                      </m:r>
-                      <m:r>
-                        <m:rPr>
-                          <m:nor/>
-                        </m:rPr>
-                        <a:rPr lang="en-IN" sz="2400" i="0" smtClean="0">
-                          <a:latin typeface="Cambria Math" panose="02040503050406030204" pitchFamily="18" charset="0"/>
-                        </a:rPr>
-                        <m:t>CV</m:t>
-                      </m:r>
-                      <m:r>
-                        <a:rPr lang="en-IN" sz="2400" i="1" smtClean="0">
-                          <a:latin typeface="Cambria Math" panose="02040503050406030204" pitchFamily="18" charset="0"/>
-                        </a:rPr>
-                        <m:t>=</m:t>
-                      </m:r>
-                      <m:f>
-                        <m:fPr>
-                          <m:ctrlPr>
-                            <a:rPr lang="en-IN" sz="2400" i="1" smtClean="0">
-                              <a:latin typeface="Cambria Math" panose="02040503050406030204" pitchFamily="18" charset="0"/>
-                            </a:rPr>
-                          </m:ctrlPr>
-                        </m:fPr>
-                        <m:num>
-                          <m:r>
-                            <a:rPr lang="en-IN" sz="2400" i="1" smtClean="0">
-                              <a:latin typeface="Cambria Math" panose="02040503050406030204" pitchFamily="18" charset="0"/>
-                            </a:rPr>
-                            <m:t>𝜎</m:t>
-                          </m:r>
-                        </m:num>
-                        <m:den>
-                          <m:r>
-                            <a:rPr lang="en-IN" sz="2400" i="1" smtClean="0">
-                              <a:latin typeface="Cambria Math" panose="02040503050406030204" pitchFamily="18" charset="0"/>
-                            </a:rPr>
-                            <m:t>𝜇</m:t>
-                          </m:r>
-                          <m:r>
-                            <a:rPr lang="en-IN" sz="2400" i="1" smtClean="0">
-                              <a:latin typeface="Cambria Math" panose="02040503050406030204" pitchFamily="18" charset="0"/>
-                            </a:rPr>
-                            <m:t>+</m:t>
-                          </m:r>
-                          <m:r>
-                            <a:rPr lang="en-IN" sz="2400" i="1" smtClean="0">
-                              <a:latin typeface="Cambria Math" panose="02040503050406030204" pitchFamily="18" charset="0"/>
-                            </a:rPr>
-                            <m:t>𝜖</m:t>
-                          </m:r>
-                        </m:den>
-                      </m:f>
-                    </m:oMath>
-                  </m:oMathPara>
-                </a14:m>
-                <a:endParaRPr lang="en-IN" sz="2400" dirty="0"/>
-              </a:p>
-            </p:txBody>
-          </p:sp>
-        </mc:Choice>
-        <mc:Fallback>
-          <p:sp>
-            <p:nvSpPr>
-              <p:cNvPr id="3" name="TextBox 2">
-                <a:extLst>
-                  <a:ext uri="{FF2B5EF4-FFF2-40B4-BE49-F238E27FC236}">
-                    <a16:creationId xmlns:a16="http://schemas.microsoft.com/office/drawing/2014/main" id="{BB8AD40B-1D57-3208-9D9E-2DC14CC77114}"/>
-                  </a:ext>
-                </a:extLst>
-              </p:cNvPr>
-              <p:cNvSpPr txBox="1">
-                <a:spLocks noRot="1" noChangeAspect="1" noMove="1" noResize="1" noEditPoints="1" noAdjustHandles="1" noChangeArrowheads="1" noChangeShapeType="1" noTextEdit="1"/>
-              </p:cNvSpPr>
-              <p:nvPr/>
-            </p:nvSpPr>
-            <p:spPr>
-              <a:xfrm>
-                <a:off x="4653104" y="3351004"/>
-                <a:ext cx="2885790" cy="687817"/>
-              </a:xfrm>
-              <a:prstGeom prst="rect">
-                <a:avLst/>
-              </a:prstGeom>
-              <a:blipFill>
-                <a:blip r:embed="rId2"/>
-                <a:stretch>
-                  <a:fillRect/>
-                </a:stretch>
-              </a:blipFill>
-            </p:spPr>
-            <p:txBody>
-              <a:bodyPr/>
-              <a:lstStyle/>
-              <a:p>
-                <a:r>
-                  <a:rPr lang="en-IN">
-                    <a:noFill/>
-                  </a:rPr>
-                  <a:t> </a:t>
-                </a:r>
-              </a:p>
-            </p:txBody>
-          </p:sp>
-        </mc:Fallback>
-      </mc:AlternateContent>
-      <mc:AlternateContent xmlns:mc="http://schemas.openxmlformats.org/markup-compatibility/2006">
-        <mc:Choice xmlns:a14="http://schemas.microsoft.com/office/drawing/2010/main" Requires="a14">
-          <p:sp>
-            <p:nvSpPr>
-              <p:cNvPr id="4" name="TextBox 3">
-                <a:extLst>
-                  <a:ext uri="{FF2B5EF4-FFF2-40B4-BE49-F238E27FC236}">
-                    <a16:creationId xmlns:a16="http://schemas.microsoft.com/office/drawing/2014/main" id="{EF14BC7E-4EDF-B079-93C5-EB4D045D7D59}"/>
-                  </a:ext>
-                </a:extLst>
-              </p:cNvPr>
-              <p:cNvSpPr txBox="1"/>
-              <p:nvPr/>
-            </p:nvSpPr>
-            <p:spPr>
-              <a:xfrm>
-                <a:off x="3961056" y="2353660"/>
-                <a:ext cx="4269887" cy="601575"/>
-              </a:xfrm>
-              <a:prstGeom prst="rect">
-                <a:avLst/>
-              </a:prstGeom>
-              <a:noFill/>
-            </p:spPr>
-            <p:txBody>
-              <a:bodyPr wrap="none" lIns="0" tIns="0" rIns="0" bIns="0" rtlCol="0">
-                <a:spAutoFit/>
-              </a:bodyPr>
-              <a:lstStyle/>
-              <a:p>
-                <a14:m>
-                  <m:oMathPara xmlns:m="http://schemas.openxmlformats.org/officeDocument/2006/math">
-                    <m:oMath>
-                      <m:r>
-                        <m:rPr>
-                          <m:nor/>
-                        </m:rPr>
-                        <a:rPr lang="en-IN" b="0" i="0" smtClean="0">
-                          <a:latin typeface="Cambria Math" panose="02040503050406030204" pitchFamily="18" charset="0"/>
-                        </a:rPr>
-                        <m:t>Consumption </m:t>
-                      </m:r>
-                      <m:r>
-                        <m:rPr>
-                          <m:nor/>
-                        </m:rPr>
-                        <a:rPr lang="en-IN" i="0" smtClean="0">
-                          <a:latin typeface="Cambria Math" panose="02040503050406030204" pitchFamily="18" charset="0"/>
-                        </a:rPr>
-                        <m:t>Drop</m:t>
-                      </m:r>
-                      <m:r>
-                        <a:rPr lang="en-IN" b="0" i="1" smtClean="0">
-                          <a:latin typeface="Cambria Math" panose="02040503050406030204" pitchFamily="18" charset="0"/>
-                        </a:rPr>
-                        <m:t> </m:t>
-                      </m:r>
-                      <m:r>
-                        <a:rPr lang="en-IN" b="0" i="1" smtClean="0">
-                          <a:latin typeface="Cambria Math" panose="02040503050406030204" pitchFamily="18" charset="0"/>
-                        </a:rPr>
-                        <m:t>𝑅𝑎𝑡𝑖𝑜</m:t>
-                      </m:r>
-                      <m:r>
-                        <a:rPr lang="en-IN" b="0" i="1" smtClean="0">
-                          <a:latin typeface="Cambria Math" panose="02040503050406030204" pitchFamily="18" charset="0"/>
-                        </a:rPr>
-                        <m:t> 30</m:t>
-                      </m:r>
-                      <m:r>
-                        <m:rPr>
-                          <m:nor/>
-                        </m:rPr>
-                        <a:rPr lang="en-IN" i="0" smtClean="0">
-                          <a:latin typeface="Cambria Math" panose="02040503050406030204" pitchFamily="18" charset="0"/>
-                        </a:rPr>
-                        <m:t>d</m:t>
-                      </m:r>
-                      <m:r>
-                        <a:rPr lang="en-IN" i="1" smtClean="0">
-                          <a:latin typeface="Cambria Math" panose="02040503050406030204" pitchFamily="18" charset="0"/>
-                        </a:rPr>
-                        <m:t>=</m:t>
-                      </m:r>
-                      <m:f>
-                        <m:fPr>
-                          <m:ctrlPr>
-                            <a:rPr lang="en-IN" i="1" smtClean="0">
-                              <a:latin typeface="Cambria Math" panose="02040503050406030204" pitchFamily="18" charset="0"/>
-                            </a:rPr>
-                          </m:ctrlPr>
-                        </m:fPr>
-                        <m:num>
-                          <m:r>
-                            <a:rPr lang="en-IN" i="1" smtClean="0">
-                              <a:latin typeface="Cambria Math" panose="02040503050406030204" pitchFamily="18" charset="0"/>
-                            </a:rPr>
-                            <m:t>𝜇</m:t>
-                          </m:r>
-                          <m:r>
-                            <m:rPr>
-                              <m:nor/>
-                            </m:rPr>
-                            <a:rPr lang="en-IN" b="0" i="0" smtClean="0">
-                              <a:latin typeface="Cambria Math" panose="02040503050406030204" pitchFamily="18" charset="0"/>
-                            </a:rPr>
-                            <m:t>30</m:t>
-                          </m:r>
-                          <m:r>
-                            <m:rPr>
-                              <m:nor/>
-                            </m:rPr>
-                            <a:rPr lang="en-IN" i="0" smtClean="0">
-                              <a:latin typeface="Cambria Math" panose="02040503050406030204" pitchFamily="18" charset="0"/>
-                            </a:rPr>
-                            <m:t>d</m:t>
-                          </m:r>
-                        </m:num>
-                        <m:den>
-                          <m:sSub>
-                            <m:sSubPr>
-                              <m:ctrlPr>
-                                <a:rPr lang="en-IN" i="1" smtClean="0">
-                                  <a:latin typeface="Cambria Math" panose="02040503050406030204" pitchFamily="18" charset="0"/>
-                                </a:rPr>
-                              </m:ctrlPr>
-                            </m:sSubPr>
-                            <m:e>
-                              <m:r>
-                                <a:rPr lang="en-IN" i="1" smtClean="0">
-                                  <a:latin typeface="Cambria Math" panose="02040503050406030204" pitchFamily="18" charset="0"/>
-                                </a:rPr>
-                                <m:t>𝜇</m:t>
-                              </m:r>
-                            </m:e>
-                            <m:sub>
-                              <m:r>
-                                <m:rPr>
-                                  <m:nor/>
-                                </m:rPr>
-                                <a:rPr lang="en-IN" i="0" smtClean="0">
-                                  <a:latin typeface="Cambria Math" panose="02040503050406030204" pitchFamily="18" charset="0"/>
-                                </a:rPr>
-                                <m:t>total</m:t>
-                              </m:r>
-                            </m:sub>
-                          </m:sSub>
-                          <m:r>
-                            <a:rPr lang="en-IN" i="1" smtClean="0">
-                              <a:latin typeface="Cambria Math" panose="02040503050406030204" pitchFamily="18" charset="0"/>
-                            </a:rPr>
-                            <m:t>+</m:t>
-                          </m:r>
-                          <m:r>
-                            <a:rPr lang="en-IN" i="1" smtClean="0">
-                              <a:latin typeface="Cambria Math" panose="02040503050406030204" pitchFamily="18" charset="0"/>
-                            </a:rPr>
-                            <m:t>𝜖</m:t>
-                          </m:r>
-                        </m:den>
-                      </m:f>
-                    </m:oMath>
-                  </m:oMathPara>
-                </a14:m>
-                <a:endParaRPr lang="en-IN" dirty="0"/>
-              </a:p>
-            </p:txBody>
-          </p:sp>
-        </mc:Choice>
-        <mc:Fallback>
-          <p:sp>
-            <p:nvSpPr>
-              <p:cNvPr id="4" name="TextBox 3">
-                <a:extLst>
-                  <a:ext uri="{FF2B5EF4-FFF2-40B4-BE49-F238E27FC236}">
-                    <a16:creationId xmlns:a16="http://schemas.microsoft.com/office/drawing/2014/main" id="{EF14BC7E-4EDF-B079-93C5-EB4D045D7D59}"/>
-                  </a:ext>
-                </a:extLst>
-              </p:cNvPr>
-              <p:cNvSpPr txBox="1">
-                <a:spLocks noRot="1" noChangeAspect="1" noMove="1" noResize="1" noEditPoints="1" noAdjustHandles="1" noChangeArrowheads="1" noChangeShapeType="1" noTextEdit="1"/>
-              </p:cNvSpPr>
-              <p:nvPr/>
-            </p:nvSpPr>
-            <p:spPr>
-              <a:xfrm>
-                <a:off x="3961056" y="2353660"/>
-                <a:ext cx="4269887" cy="601575"/>
-              </a:xfrm>
-              <a:prstGeom prst="rect">
-                <a:avLst/>
-              </a:prstGeom>
-              <a:blipFill>
-                <a:blip r:embed="rId3"/>
-                <a:stretch>
-                  <a:fillRect/>
-                </a:stretch>
-              </a:blipFill>
-            </p:spPr>
-            <p:txBody>
-              <a:bodyPr/>
-              <a:lstStyle/>
-              <a:p>
-                <a:r>
-                  <a:rPr lang="en-IN">
-                    <a:noFill/>
-                  </a:rPr>
-                  <a:t> </a:t>
-                </a:r>
-              </a:p>
-            </p:txBody>
-          </p:sp>
-        </mc:Fallback>
-      </mc:AlternateContent>
-      <p:sp>
-        <p:nvSpPr>
-          <p:cNvPr id="5" name="TextBox 4">
-            <a:extLst>
-              <a:ext uri="{FF2B5EF4-FFF2-40B4-BE49-F238E27FC236}">
-                <a16:creationId xmlns:a16="http://schemas.microsoft.com/office/drawing/2014/main" id="{6C2965E9-3FFF-1605-050F-1B86DB466A81}"/>
+      <p:sp>
+        <p:nvSpPr>
+          <p:cNvPr id="4" name="TextBox 3">
+            <a:extLst>
+              <a:ext uri="{FF2B5EF4-FFF2-40B4-BE49-F238E27FC236}">
+                <a16:creationId xmlns:a16="http://schemas.microsoft.com/office/drawing/2014/main" id="{B4025D0B-D5A8-C67B-8B28-9FCC1F1FDD59}"/>
               </a:ext>
             </a:extLst>
           </p:cNvPr>
@@ -12195,8 +12224,8 @@
         </p:nvSpPr>
         <p:spPr>
           <a:xfrm>
-            <a:off x="3352800" y="4636546"/>
-            <a:ext cx="5572461" cy="369332"/>
+            <a:off x="1807284" y="2705725"/>
+            <a:ext cx="8577431" cy="1446550"/>
           </a:xfrm>
           <a:prstGeom prst="rect">
             <a:avLst/>
@@ -12211,8 +12240,8 @@
           <a:p>
             <a:pPr algn="ctr"/>
             <a:r>
-              <a:rPr lang="en-IN" dirty="0"/>
-              <a:t>AUC-PR (Precision Recall AUC)</a:t>
+              <a:rPr lang="en-IN" sz="8800" dirty="0"/>
+              <a:t>Thank You</a:t>
             </a:r>
           </a:p>
         </p:txBody>
@@ -12220,313 +12249,7 @@
     </p:spTree>
     <p:extLst>
       <p:ext uri="{BB962C8B-B14F-4D97-AF65-F5344CB8AC3E}">
-        <p14:creationId xmlns:p14="http://schemas.microsoft.com/office/powerpoint/2010/main" val="2047902027"/>
-      </p:ext>
-    </p:extLst>
-  </p:cSld>
-  <p:clrMapOvr>
-    <a:masterClrMapping/>
-  </p:clrMapOvr>
-  <p:transition spd="slow">
-    <p:wipe/>
-  </p:transition>
-  <p:timing>
-    <p:tnLst>
-      <p:par>
-        <p:cTn id="1" dur="indefinite" restart="never" nodeType="tmRoot">
-          <p:childTnLst>
-            <p:seq concurrent="1" nextAc="seek">
-              <p:cTn id="2" dur="indefinite" nodeType="mainSeq">
-                <p:childTnLst>
-                  <p:par>
-                    <p:cTn id="3" fill="hold">
-                      <p:stCondLst>
-                        <p:cond delay="indefinite"/>
-                      </p:stCondLst>
-                      <p:childTnLst>
-                        <p:par>
-                          <p:cTn id="4" fill="hold">
-                            <p:stCondLst>
-                              <p:cond delay="0"/>
-                            </p:stCondLst>
-                            <p:childTnLst>
-                              <p:par>
-                                <p:cTn id="5" presetID="10" presetClass="entr" presetSubtype="0" fill="hold" grpId="0" nodeType="clickEffect">
-                                  <p:stCondLst>
-                                    <p:cond delay="0"/>
-                                  </p:stCondLst>
-                                  <p:childTnLst>
-                                    <p:set>
-                                      <p:cBhvr>
-                                        <p:cTn id="6" dur="1" fill="hold">
-                                          <p:stCondLst>
-                                            <p:cond delay="0"/>
-                                          </p:stCondLst>
-                                        </p:cTn>
-                                        <p:tgtEl>
-                                          <p:spTgt spid="5"/>
-                                        </p:tgtEl>
-                                        <p:attrNameLst>
-                                          <p:attrName>style.visibility</p:attrName>
-                                        </p:attrNameLst>
-                                      </p:cBhvr>
-                                      <p:to>
-                                        <p:strVal val="visible"/>
-                                      </p:to>
-                                    </p:set>
-                                    <p:animEffect transition="in" filter="fade">
-                                      <p:cBhvr>
-                                        <p:cTn id="7" dur="500"/>
-                                        <p:tgtEl>
-                                          <p:spTgt spid="5"/>
-                                        </p:tgtEl>
-                                      </p:cBhvr>
-                                    </p:animEffect>
-                                  </p:childTnLst>
-                                </p:cTn>
-                              </p:par>
-                              <p:par>
-                                <p:cTn id="8" presetID="10" presetClass="entr" presetSubtype="0" fill="hold" grpId="0" nodeType="withEffect">
-                                  <p:stCondLst>
-                                    <p:cond delay="0"/>
-                                  </p:stCondLst>
-                                  <p:childTnLst>
-                                    <p:set>
-                                      <p:cBhvr>
-                                        <p:cTn id="9" dur="1" fill="hold">
-                                          <p:stCondLst>
-                                            <p:cond delay="0"/>
-                                          </p:stCondLst>
-                                        </p:cTn>
-                                        <p:tgtEl>
-                                          <p:spTgt spid="3"/>
-                                        </p:tgtEl>
-                                        <p:attrNameLst>
-                                          <p:attrName>style.visibility</p:attrName>
-                                        </p:attrNameLst>
-                                      </p:cBhvr>
-                                      <p:to>
-                                        <p:strVal val="visible"/>
-                                      </p:to>
-                                    </p:set>
-                                    <p:animEffect transition="in" filter="fade">
-                                      <p:cBhvr>
-                                        <p:cTn id="10" dur="500"/>
-                                        <p:tgtEl>
-                                          <p:spTgt spid="3"/>
-                                        </p:tgtEl>
-                                      </p:cBhvr>
-                                    </p:animEffect>
-                                  </p:childTnLst>
-                                </p:cTn>
-                              </p:par>
-                              <p:par>
-                                <p:cTn id="11" presetID="10" presetClass="entr" presetSubtype="0" fill="hold" grpId="0" nodeType="withEffect">
-                                  <p:stCondLst>
-                                    <p:cond delay="0"/>
-                                  </p:stCondLst>
-                                  <p:childTnLst>
-                                    <p:set>
-                                      <p:cBhvr>
-                                        <p:cTn id="12" dur="1" fill="hold">
-                                          <p:stCondLst>
-                                            <p:cond delay="0"/>
-                                          </p:stCondLst>
-                                        </p:cTn>
-                                        <p:tgtEl>
-                                          <p:spTgt spid="4"/>
-                                        </p:tgtEl>
-                                        <p:attrNameLst>
-                                          <p:attrName>style.visibility</p:attrName>
-                                        </p:attrNameLst>
-                                      </p:cBhvr>
-                                      <p:to>
-                                        <p:strVal val="visible"/>
-                                      </p:to>
-                                    </p:set>
-                                    <p:animEffect transition="in" filter="fade">
-                                      <p:cBhvr>
-                                        <p:cTn id="13" dur="500"/>
-                                        <p:tgtEl>
-                                          <p:spTgt spid="4"/>
-                                        </p:tgtEl>
-                                      </p:cBhvr>
-                                    </p:animEffect>
-                                  </p:childTnLst>
-                                </p:cTn>
-                              </p:par>
-                            </p:childTnLst>
-                          </p:cTn>
-                        </p:par>
-                      </p:childTnLst>
-                    </p:cTn>
-                  </p:par>
-                </p:childTnLst>
-              </p:cTn>
-              <p:prevCondLst>
-                <p:cond evt="onPrev" delay="0">
-                  <p:tgtEl>
-                    <p:sldTgt/>
-                  </p:tgtEl>
-                </p:cond>
-              </p:prevCondLst>
-              <p:nextCondLst>
-                <p:cond evt="onNext" delay="0">
-                  <p:tgtEl>
-                    <p:sldTgt/>
-                  </p:tgtEl>
-                </p:cond>
-              </p:nextCondLst>
-            </p:seq>
-          </p:childTnLst>
-        </p:cTn>
-      </p:par>
-    </p:tnLst>
-    <p:bldLst>
-      <p:bldP spid="3" grpId="0"/>
-      <p:bldP spid="4" grpId="0"/>
-      <p:bldP spid="5" grpId="0"/>
-    </p:bldLst>
-  </p:timing>
-</p:sld>
-</file>
-
-<file path=ppt/slides/slide13.xml><?xml version="1.0" encoding="utf-8"?>
-<p:sld xmlns:a="http://schemas.openxmlformats.org/drawingml/2006/main" xmlns:r="http://schemas.openxmlformats.org/officeDocument/2006/relationships" xmlns:p="http://schemas.openxmlformats.org/presentationml/2006/main">
-  <p:cSld>
-    <p:spTree>
-      <p:nvGrpSpPr>
-        <p:cNvPr id="1" name="">
-          <a:extLst>
-            <a:ext uri="{FF2B5EF4-FFF2-40B4-BE49-F238E27FC236}">
-              <a16:creationId xmlns:a16="http://schemas.microsoft.com/office/drawing/2014/main" id="{C8A518A5-C5F2-3A92-25E4-26EBC6BD22B1}"/>
-            </a:ext>
-          </a:extLst>
-        </p:cNvPr>
-        <p:cNvGrpSpPr/>
-        <p:nvPr/>
-      </p:nvGrpSpPr>
-      <p:grpSpPr>
-        <a:xfrm>
-          <a:off x="0" y="0"/>
-          <a:ext cx="0" cy="0"/>
-          <a:chOff x="0" y="0"/>
-          <a:chExt cx="0" cy="0"/>
-        </a:xfrm>
-      </p:grpSpPr>
-      <p:sp>
-        <p:nvSpPr>
-          <p:cNvPr id="8" name="TextBox 7">
-            <a:extLst>
-              <a:ext uri="{FF2B5EF4-FFF2-40B4-BE49-F238E27FC236}">
-                <a16:creationId xmlns:a16="http://schemas.microsoft.com/office/drawing/2014/main" id="{BDBB17F8-FDCE-E7C1-CB7B-546A0E4A1462}"/>
-              </a:ext>
-            </a:extLst>
-          </p:cNvPr>
-          <p:cNvSpPr txBox="1"/>
-          <p:nvPr/>
-        </p:nvSpPr>
-        <p:spPr>
-          <a:xfrm>
-            <a:off x="381000" y="428178"/>
-            <a:ext cx="11204986" cy="6001643"/>
-          </a:xfrm>
-          <a:prstGeom prst="rect">
-            <a:avLst/>
-          </a:prstGeom>
-          <a:noFill/>
-        </p:spPr>
-        <p:txBody>
-          <a:bodyPr wrap="square" rtlCol="0">
-            <a:spAutoFit/>
-          </a:bodyPr>
-          <a:lstStyle/>
-          <a:p>
-            <a:r>
-              <a:rPr lang="en-IN" sz="2400" b="1" dirty="0"/>
-              <a:t>Completed Tasks:</a:t>
-            </a:r>
-          </a:p>
-          <a:p>
-            <a:br>
-              <a:rPr lang="en-IN" sz="2400" dirty="0"/>
-            </a:br>
-            <a:r>
-              <a:rPr lang="en-IN" sz="2400" dirty="0"/>
-              <a:t>Data Ingestion and Cleaning</a:t>
-            </a:r>
-            <a:br>
-              <a:rPr lang="en-IN" sz="2400" dirty="0"/>
-            </a:br>
-            <a:br>
-              <a:rPr lang="en-IN" sz="2400" dirty="0"/>
-            </a:br>
-            <a:r>
-              <a:rPr lang="en-IN" sz="2400" dirty="0"/>
-              <a:t>ML Pipeline Created and Executed</a:t>
-            </a:r>
-            <a:br>
-              <a:rPr lang="en-IN" sz="2400" dirty="0"/>
-            </a:br>
-            <a:br>
-              <a:rPr lang="en-IN" sz="2400" dirty="0"/>
-            </a:br>
-            <a:r>
-              <a:rPr lang="en-IN" sz="2400" dirty="0"/>
-              <a:t>Output Generation to CSV</a:t>
-            </a:r>
-          </a:p>
-          <a:p>
-            <a:endParaRPr lang="en-IN" sz="2400" dirty="0"/>
-          </a:p>
-          <a:p>
-            <a:r>
-              <a:rPr lang="en-IN" sz="2400" dirty="0"/>
-              <a:t>Configured Environment</a:t>
-            </a:r>
-          </a:p>
-          <a:p>
-            <a:endParaRPr lang="en-IN" sz="2400" dirty="0"/>
-          </a:p>
-          <a:p>
-            <a:endParaRPr lang="en-IN" sz="2400" dirty="0"/>
-          </a:p>
-          <a:p>
-            <a:r>
-              <a:rPr lang="en-IN" sz="2400" b="1" dirty="0"/>
-              <a:t>Tasks to be completed:</a:t>
-            </a:r>
-            <a:br>
-              <a:rPr lang="en-IN" sz="2400" b="1" dirty="0"/>
-            </a:br>
-            <a:endParaRPr lang="en-IN" sz="2400" b="1" dirty="0"/>
-          </a:p>
-          <a:p>
-            <a:r>
-              <a:rPr lang="en-IN" sz="2400" dirty="0" err="1"/>
-              <a:t>FastAPI</a:t>
-            </a:r>
-            <a:r>
-              <a:rPr lang="en-IN" sz="2400" dirty="0"/>
-              <a:t> Endpoints</a:t>
-            </a:r>
-            <a:br>
-              <a:rPr lang="en-IN" sz="2400" dirty="0"/>
-            </a:br>
-            <a:br>
-              <a:rPr lang="en-IN" sz="2400" dirty="0"/>
-            </a:br>
-            <a:r>
-              <a:rPr lang="en-IN" sz="2400" dirty="0"/>
-              <a:t>React Frontend</a:t>
-            </a:r>
-          </a:p>
-        </p:txBody>
-      </p:sp>
-    </p:spTree>
-    <p:extLst>
-      <p:ext uri="{BB962C8B-B14F-4D97-AF65-F5344CB8AC3E}">
-        <p14:creationId xmlns:p14="http://schemas.microsoft.com/office/powerpoint/2010/main" val="690055282"/>
+        <p14:creationId xmlns:p14="http://schemas.microsoft.com/office/powerpoint/2010/main" val="1740452684"/>
       </p:ext>
     </p:extLst>
   </p:cSld>
@@ -12693,7 +12416,13 @@
   <p:cSld>
     <p:spTree>
       <p:nvGrpSpPr>
-        <p:cNvPr id="1" name=""/>
+        <p:cNvPr id="1" name="">
+          <a:extLst>
+            <a:ext uri="{FF2B5EF4-FFF2-40B4-BE49-F238E27FC236}">
+              <a16:creationId xmlns:a16="http://schemas.microsoft.com/office/drawing/2014/main" id="{5727F30D-E834-AD87-1E41-0ECE2F6C4922}"/>
+            </a:ext>
+          </a:extLst>
+        </p:cNvPr>
         <p:cNvGrpSpPr/>
         <p:nvPr/>
       </p:nvGrpSpPr>
@@ -12710,7 +12439,7 @@
           <p:cNvPr id="2" name="Title 1">
             <a:extLst>
               <a:ext uri="{FF2B5EF4-FFF2-40B4-BE49-F238E27FC236}">
-                <a16:creationId xmlns:a16="http://schemas.microsoft.com/office/drawing/2014/main" id="{1ECC7084-C959-6935-0D99-455326A78F99}"/>
+                <a16:creationId xmlns:a16="http://schemas.microsoft.com/office/drawing/2014/main" id="{3888BA98-B09E-0B44-7299-1B650EED9887}"/>
               </a:ext>
             </a:extLst>
           </p:cNvPr>
@@ -12733,7 +12462,7 @@
           <a:p>
             <a:r>
               <a:rPr lang="en-US" dirty="0"/>
-              <a:t>Innovation</a:t>
+              <a:t>Functionality</a:t>
             </a:r>
           </a:p>
         </p:txBody>
@@ -12741,20 +12470,20 @@
     </p:spTree>
     <p:extLst>
       <p:ext uri="{BB962C8B-B14F-4D97-AF65-F5344CB8AC3E}">
-        <p14:creationId xmlns:p14="http://schemas.microsoft.com/office/powerpoint/2010/main" val="1751885377"/>
+        <p14:creationId xmlns:p14="http://schemas.microsoft.com/office/powerpoint/2010/main" val="3906133934"/>
       </p:ext>
     </p:extLst>
   </p:cSld>
   <p:clrMapOvr>
     <a:masterClrMapping/>
   </p:clrMapOvr>
-  <mc:AlternateContent xmlns:mc="http://schemas.openxmlformats.org/markup-compatibility/2006">
-    <mc:Choice xmlns:p159="http://schemas.microsoft.com/office/powerpoint/2015/09/main" Requires="p159">
+  <mc:AlternateContent xmlns:mc="http://schemas.openxmlformats.org/markup-compatibility/2006" xmlns:p159="http://schemas.microsoft.com/office/powerpoint/2015/09/main">
+    <mc:Choice Requires="p159">
       <p:transition xmlns:p14="http://schemas.microsoft.com/office/powerpoint/2010/main" spd="slow" p14:dur="2000">
         <p159:morph option="byObject"/>
       </p:transition>
     </mc:Choice>
-    <mc:Fallback>
+    <mc:Fallback xmlns="">
       <p:transition spd="slow">
         <p:fade/>
       </p:transition>
@@ -12782,63 +12511,80 @@
       </p:grpSpPr>
       <p:sp>
         <p:nvSpPr>
-          <p:cNvPr id="2" name="Title 1">
-            <a:extLst>
-              <a:ext uri="{FF2B5EF4-FFF2-40B4-BE49-F238E27FC236}">
-                <a16:creationId xmlns:a16="http://schemas.microsoft.com/office/drawing/2014/main" id="{DB22CC9C-AE86-D77D-2F74-8B39860A88F6}"/>
-              </a:ext>
-            </a:extLst>
-          </p:cNvPr>
-          <p:cNvSpPr>
-            <a:spLocks noGrp="1"/>
-          </p:cNvSpPr>
-          <p:nvPr>
-            <p:ph type="title"/>
-          </p:nvPr>
-        </p:nvSpPr>
-        <p:spPr>
-          <a:xfrm>
-            <a:off x="2377440" y="5099503"/>
-            <a:ext cx="7525512" cy="1933310"/>
-          </a:xfrm>
-        </p:spPr>
-        <p:txBody>
-          <a:bodyPr/>
-          <a:lstStyle/>
-          <a:p>
-            <a:r>
-              <a:rPr lang="en-US" dirty="0"/>
-              <a:t>At times, theft is the result of silent, gradual changes. We aim to catch these silent changes by reducing static thresholds and using time-series feature engineering.</a:t>
-            </a:r>
-          </a:p>
-        </p:txBody>
-      </p:sp>
-      <p:sp>
-        <p:nvSpPr>
-          <p:cNvPr id="3" name="Content Placeholder 2">
-            <a:extLst>
-              <a:ext uri="{FF2B5EF4-FFF2-40B4-BE49-F238E27FC236}">
-                <a16:creationId xmlns:a16="http://schemas.microsoft.com/office/drawing/2014/main" id="{24CAA463-F531-1FC1-6826-167C367BDDA1}"/>
-              </a:ext>
-            </a:extLst>
-          </p:cNvPr>
-          <p:cNvSpPr>
-            <a:spLocks noGrp="1"/>
-          </p:cNvSpPr>
-          <p:nvPr>
-            <p:ph sz="quarter" idx="13"/>
-          </p:nvPr>
-        </p:nvSpPr>
-        <p:spPr/>
-        <p:txBody>
-          <a:bodyPr>
-            <a:normAutofit/>
+          <p:cNvPr id="4" name="TextBox 3">
+            <a:extLst>
+              <a:ext uri="{FF2B5EF4-FFF2-40B4-BE49-F238E27FC236}">
+                <a16:creationId xmlns:a16="http://schemas.microsoft.com/office/drawing/2014/main" id="{537509F1-8740-43D3-6F69-40CEB7D0A18D}"/>
+              </a:ext>
+            </a:extLst>
+          </p:cNvPr>
+          <p:cNvSpPr txBox="1"/>
+          <p:nvPr/>
+        </p:nvSpPr>
+        <p:spPr>
+          <a:xfrm>
+            <a:off x="419100" y="419100"/>
+            <a:ext cx="5357756" cy="6186309"/>
+          </a:xfrm>
+          <a:prstGeom prst="rect">
+            <a:avLst/>
+          </a:prstGeom>
+          <a:noFill/>
+        </p:spPr>
+        <p:txBody>
+          <a:bodyPr wrap="square" rtlCol="0">
+            <a:spAutoFit/>
           </a:bodyPr>
           <a:lstStyle/>
           <a:p>
             <a:r>
-              <a:rPr lang="en-US" sz="11500" b="1" dirty="0"/>
-              <a:t>Dynamic Load Profiling</a:t>
+              <a:rPr lang="en-IN" dirty="0"/>
+              <a:t>An application that is meant to tackle a big issue in modern-day resource sharing – electricity and theft via electric meters</a:t>
+            </a:r>
+          </a:p>
+          <a:p>
+            <a:endParaRPr lang="en-IN" dirty="0"/>
+          </a:p>
+          <a:p>
+            <a:r>
+              <a:rPr lang="en-IN" dirty="0"/>
+              <a:t>People piggyback, or feed off, of others’ electric meters- which leads to rising costs for the average, law-abiding person while criminals get away with their theft.</a:t>
+            </a:r>
+          </a:p>
+          <a:p>
+            <a:endParaRPr lang="en-IN" dirty="0"/>
+          </a:p>
+          <a:p>
+            <a:r>
+              <a:rPr lang="en-IN" dirty="0"/>
+              <a:t>Over a period of 3 years, roughly 40,000 entries were stored in a dataset.</a:t>
+            </a:r>
+          </a:p>
+          <a:p>
+            <a:endParaRPr lang="en-IN" dirty="0"/>
+          </a:p>
+          <a:p>
+            <a:r>
+              <a:rPr lang="en-IN" dirty="0"/>
+              <a:t>This amount is far from human analysis.</a:t>
+            </a:r>
+          </a:p>
+          <a:p>
+            <a:endParaRPr lang="en-IN" dirty="0"/>
+          </a:p>
+          <a:p>
+            <a:r>
+              <a:rPr lang="en-IN" dirty="0"/>
+              <a:t>Hence, this system incorporates a Human In The Loop (HITL) system to decide whether people have committed genuine cases of electricity theft or if they’re false alarms. </a:t>
+            </a:r>
+          </a:p>
+          <a:p>
+            <a:endParaRPr lang="en-IN" dirty="0"/>
+          </a:p>
+          <a:p>
+            <a:r>
+              <a:rPr lang="en-IN" dirty="0"/>
+              <a:t>This will lead to saving billions of dollars in money and will help in creating a safer and responsible society.</a:t>
             </a:r>
           </a:p>
         </p:txBody>
@@ -12846,7 +12592,7 @@
     </p:spTree>
     <p:extLst>
       <p:ext uri="{BB962C8B-B14F-4D97-AF65-F5344CB8AC3E}">
-        <p14:creationId xmlns:p14="http://schemas.microsoft.com/office/powerpoint/2010/main" val="3408536552"/>
+        <p14:creationId xmlns:p14="http://schemas.microsoft.com/office/powerpoint/2010/main" val="2645052839"/>
       </p:ext>
     </p:extLst>
   </p:cSld>
@@ -12873,6 +12619,186 @@
   <p:cSld>
     <p:spTree>
       <p:nvGrpSpPr>
+        <p:cNvPr id="1" name=""/>
+        <p:cNvGrpSpPr/>
+        <p:nvPr/>
+      </p:nvGrpSpPr>
+      <p:grpSpPr>
+        <a:xfrm>
+          <a:off x="0" y="0"/>
+          <a:ext cx="0" cy="0"/>
+          <a:chOff x="0" y="0"/>
+          <a:chExt cx="0" cy="0"/>
+        </a:xfrm>
+      </p:grpSpPr>
+      <p:sp>
+        <p:nvSpPr>
+          <p:cNvPr id="2" name="Title 1">
+            <a:extLst>
+              <a:ext uri="{FF2B5EF4-FFF2-40B4-BE49-F238E27FC236}">
+                <a16:creationId xmlns:a16="http://schemas.microsoft.com/office/drawing/2014/main" id="{1ECC7084-C959-6935-0D99-455326A78F99}"/>
+              </a:ext>
+            </a:extLst>
+          </p:cNvPr>
+          <p:cNvSpPr>
+            <a:spLocks noGrp="1"/>
+          </p:cNvSpPr>
+          <p:nvPr>
+            <p:ph type="title"/>
+          </p:nvPr>
+        </p:nvSpPr>
+        <p:spPr>
+          <a:xfrm>
+            <a:off x="2270125" y="990600"/>
+            <a:ext cx="9145588" cy="3630613"/>
+          </a:xfrm>
+        </p:spPr>
+        <p:txBody>
+          <a:bodyPr anchor="b"/>
+          <a:lstStyle/>
+          <a:p>
+            <a:r>
+              <a:rPr lang="en-US" dirty="0"/>
+              <a:t>Innovation</a:t>
+            </a:r>
+          </a:p>
+        </p:txBody>
+      </p:sp>
+    </p:spTree>
+    <p:extLst>
+      <p:ext uri="{BB962C8B-B14F-4D97-AF65-F5344CB8AC3E}">
+        <p14:creationId xmlns:p14="http://schemas.microsoft.com/office/powerpoint/2010/main" val="1751885377"/>
+      </p:ext>
+    </p:extLst>
+  </p:cSld>
+  <p:clrMapOvr>
+    <a:masterClrMapping/>
+  </p:clrMapOvr>
+  <mc:AlternateContent xmlns:mc="http://schemas.openxmlformats.org/markup-compatibility/2006" xmlns:p159="http://schemas.microsoft.com/office/powerpoint/2015/09/main">
+    <mc:Choice Requires="p159">
+      <p:transition xmlns:p14="http://schemas.microsoft.com/office/powerpoint/2010/main" spd="slow" p14:dur="2000">
+        <p159:morph option="byObject"/>
+      </p:transition>
+    </mc:Choice>
+    <mc:Fallback xmlns="">
+      <p:transition spd="slow">
+        <p:fade/>
+      </p:transition>
+    </mc:Fallback>
+  </mc:AlternateContent>
+</p:sld>
+</file>
+
+<file path=ppt/slides/slide6.xml><?xml version="1.0" encoding="utf-8"?>
+<p:sld xmlns:a="http://schemas.openxmlformats.org/drawingml/2006/main" xmlns:r="http://schemas.openxmlformats.org/officeDocument/2006/relationships" xmlns:p="http://schemas.openxmlformats.org/presentationml/2006/main">
+  <p:cSld>
+    <p:spTree>
+      <p:nvGrpSpPr>
+        <p:cNvPr id="1" name=""/>
+        <p:cNvGrpSpPr/>
+        <p:nvPr/>
+      </p:nvGrpSpPr>
+      <p:grpSpPr>
+        <a:xfrm>
+          <a:off x="0" y="0"/>
+          <a:ext cx="0" cy="0"/>
+          <a:chOff x="0" y="0"/>
+          <a:chExt cx="0" cy="0"/>
+        </a:xfrm>
+      </p:grpSpPr>
+      <p:sp>
+        <p:nvSpPr>
+          <p:cNvPr id="2" name="Title 1">
+            <a:extLst>
+              <a:ext uri="{FF2B5EF4-FFF2-40B4-BE49-F238E27FC236}">
+                <a16:creationId xmlns:a16="http://schemas.microsoft.com/office/drawing/2014/main" id="{DB22CC9C-AE86-D77D-2F74-8B39860A88F6}"/>
+              </a:ext>
+            </a:extLst>
+          </p:cNvPr>
+          <p:cNvSpPr>
+            <a:spLocks noGrp="1"/>
+          </p:cNvSpPr>
+          <p:nvPr>
+            <p:ph type="title"/>
+          </p:nvPr>
+        </p:nvSpPr>
+        <p:spPr>
+          <a:xfrm>
+            <a:off x="2377440" y="5099503"/>
+            <a:ext cx="7525512" cy="1933310"/>
+          </a:xfrm>
+        </p:spPr>
+        <p:txBody>
+          <a:bodyPr/>
+          <a:lstStyle/>
+          <a:p>
+            <a:r>
+              <a:rPr lang="en-US" dirty="0"/>
+              <a:t>At times, theft is the result of silent, gradual changes. We aim to catch these silent changes by reducing static thresholds and using time-series feature engineering.</a:t>
+            </a:r>
+          </a:p>
+        </p:txBody>
+      </p:sp>
+      <p:sp>
+        <p:nvSpPr>
+          <p:cNvPr id="3" name="Content Placeholder 2">
+            <a:extLst>
+              <a:ext uri="{FF2B5EF4-FFF2-40B4-BE49-F238E27FC236}">
+                <a16:creationId xmlns:a16="http://schemas.microsoft.com/office/drawing/2014/main" id="{24CAA463-F531-1FC1-6826-167C367BDDA1}"/>
+              </a:ext>
+            </a:extLst>
+          </p:cNvPr>
+          <p:cNvSpPr>
+            <a:spLocks noGrp="1"/>
+          </p:cNvSpPr>
+          <p:nvPr>
+            <p:ph sz="quarter" idx="13"/>
+          </p:nvPr>
+        </p:nvSpPr>
+        <p:spPr/>
+        <p:txBody>
+          <a:bodyPr>
+            <a:normAutofit/>
+          </a:bodyPr>
+          <a:lstStyle/>
+          <a:p>
+            <a:r>
+              <a:rPr lang="en-US" sz="11500" b="1" dirty="0"/>
+              <a:t>Dynamic Load Profiling</a:t>
+            </a:r>
+          </a:p>
+        </p:txBody>
+      </p:sp>
+    </p:spTree>
+    <p:extLst>
+      <p:ext uri="{BB962C8B-B14F-4D97-AF65-F5344CB8AC3E}">
+        <p14:creationId xmlns:p14="http://schemas.microsoft.com/office/powerpoint/2010/main" val="3408536552"/>
+      </p:ext>
+    </p:extLst>
+  </p:cSld>
+  <p:clrMapOvr>
+    <a:masterClrMapping/>
+  </p:clrMapOvr>
+  <mc:AlternateContent xmlns:mc="http://schemas.openxmlformats.org/markup-compatibility/2006" xmlns:p159="http://schemas.microsoft.com/office/powerpoint/2015/09/main">
+    <mc:Choice Requires="p159">
+      <p:transition xmlns:p14="http://schemas.microsoft.com/office/powerpoint/2010/main" spd="slow" p14:dur="2000">
+        <p159:morph option="byObject"/>
+      </p:transition>
+    </mc:Choice>
+    <mc:Fallback xmlns="">
+      <p:transition spd="slow">
+        <p:fade/>
+      </p:transition>
+    </mc:Fallback>
+  </mc:AlternateContent>
+</p:sld>
+</file>
+
+<file path=ppt/slides/slide7.xml><?xml version="1.0" encoding="utf-8"?>
+<p:sld xmlns:a="http://schemas.openxmlformats.org/drawingml/2006/main" xmlns:r="http://schemas.openxmlformats.org/officeDocument/2006/relationships" xmlns:p="http://schemas.openxmlformats.org/presentationml/2006/main">
+  <p:cSld>
+    <p:spTree>
+      <p:nvGrpSpPr>
         <p:cNvPr id="1" name="">
           <a:extLst>
             <a:ext uri="{FF2B5EF4-FFF2-40B4-BE49-F238E27FC236}">
@@ -12959,13 +12885,13 @@
   <p:clrMapOvr>
     <a:masterClrMapping/>
   </p:clrMapOvr>
-  <mc:AlternateContent xmlns:mc="http://schemas.openxmlformats.org/markup-compatibility/2006">
-    <mc:Choice xmlns:p159="http://schemas.microsoft.com/office/powerpoint/2015/09/main" Requires="p159">
+  <mc:AlternateContent xmlns:mc="http://schemas.openxmlformats.org/markup-compatibility/2006" xmlns:p159="http://schemas.microsoft.com/office/powerpoint/2015/09/main">
+    <mc:Choice Requires="p159">
       <p:transition xmlns:p14="http://schemas.microsoft.com/office/powerpoint/2010/main" spd="slow" p14:dur="2000">
         <p159:morph option="byObject"/>
       </p:transition>
     </mc:Choice>
-    <mc:Fallback>
+    <mc:Fallback xmlns="">
       <p:transition spd="slow">
         <p:fade/>
       </p:transition>
@@ -12974,7 +12900,7 @@
 </p:sld>
 </file>
 
-<file path=ppt/slides/slide6.xml><?xml version="1.0" encoding="utf-8"?>
+<file path=ppt/slides/slide8.xml><?xml version="1.0" encoding="utf-8"?>
 <p:sld xmlns:a="http://schemas.openxmlformats.org/drawingml/2006/main" xmlns:r="http://schemas.openxmlformats.org/officeDocument/2006/relationships" xmlns:p="http://schemas.openxmlformats.org/presentationml/2006/main">
   <p:cSld>
     <p:spTree>
@@ -13065,13 +12991,13 @@
   <p:clrMapOvr>
     <a:masterClrMapping/>
   </p:clrMapOvr>
-  <mc:AlternateContent xmlns:mc="http://schemas.openxmlformats.org/markup-compatibility/2006">
-    <mc:Choice xmlns:p159="http://schemas.microsoft.com/office/powerpoint/2015/09/main" Requires="p159">
+  <mc:AlternateContent xmlns:mc="http://schemas.openxmlformats.org/markup-compatibility/2006" xmlns:p159="http://schemas.microsoft.com/office/powerpoint/2015/09/main">
+    <mc:Choice Requires="p159">
       <p:transition xmlns:p14="http://schemas.microsoft.com/office/powerpoint/2010/main" spd="slow" p14:dur="2000">
         <p159:morph option="byObject"/>
       </p:transition>
     </mc:Choice>
-    <mc:Fallback>
+    <mc:Fallback xmlns="">
       <p:transition spd="slow">
         <p:fade/>
       </p:transition>
@@ -13080,7 +13006,7 @@
 </p:sld>
 </file>
 
-<file path=ppt/slides/slide7.xml><?xml version="1.0" encoding="utf-8"?>
+<file path=ppt/slides/slide9.xml><?xml version="1.0" encoding="utf-8"?>
 <p:sld xmlns:a="http://schemas.openxmlformats.org/drawingml/2006/main" xmlns:r="http://schemas.openxmlformats.org/officeDocument/2006/relationships" xmlns:p="http://schemas.openxmlformats.org/presentationml/2006/main">
   <p:cSld>
     <p:spTree>
@@ -13088,7 +13014,7 @@
         <p:cNvPr id="1" name="">
           <a:extLst>
             <a:ext uri="{FF2B5EF4-FFF2-40B4-BE49-F238E27FC236}">
-              <a16:creationId xmlns:a16="http://schemas.microsoft.com/office/drawing/2014/main" id="{3B125584-6ECD-26B2-203F-1E090AE60C09}"/>
+              <a16:creationId xmlns:a16="http://schemas.microsoft.com/office/drawing/2014/main" id="{31939A51-383F-A923-EF58-5DBF06572BAB}"/>
             </a:ext>
           </a:extLst>
         </p:cNvPr>
@@ -13108,7 +13034,7 @@
           <p:cNvPr id="2" name="Title 1">
             <a:extLst>
               <a:ext uri="{FF2B5EF4-FFF2-40B4-BE49-F238E27FC236}">
-                <a16:creationId xmlns:a16="http://schemas.microsoft.com/office/drawing/2014/main" id="{79DC926F-5672-9EC4-DBC6-119361BDDE5D}"/>
+                <a16:creationId xmlns:a16="http://schemas.microsoft.com/office/drawing/2014/main" id="{66840978-3BE8-579B-E29B-7BBF94DDA6AA}"/>
               </a:ext>
             </a:extLst>
           </p:cNvPr>
@@ -13131,336 +13057,34 @@
           <a:p>
             <a:r>
               <a:rPr lang="en-US" dirty="0"/>
-              <a:t>Relevancy</a:t>
-            </a:r>
-            <a:br>
-              <a:rPr lang="en-US" dirty="0"/>
-            </a:br>
-            <a:br>
-              <a:rPr lang="en-US" sz="1200" dirty="0"/>
-            </a:br>
-            <a:r>
-              <a:rPr lang="en-US" sz="1600" dirty="0"/>
-              <a:t>a few numbers to relate to this statement</a:t>
-            </a:r>
-            <a:endParaRPr lang="en-US" dirty="0"/>
+              <a:t>Technicality</a:t>
+            </a:r>
+            <a:endParaRPr lang="en-US" i="1" dirty="0"/>
           </a:p>
         </p:txBody>
       </p:sp>
     </p:spTree>
     <p:extLst>
       <p:ext uri="{BB962C8B-B14F-4D97-AF65-F5344CB8AC3E}">
-        <p14:creationId xmlns:p14="http://schemas.microsoft.com/office/powerpoint/2010/main" val="1134254760"/>
+        <p14:creationId xmlns:p14="http://schemas.microsoft.com/office/powerpoint/2010/main" val="2875229419"/>
       </p:ext>
     </p:extLst>
   </p:cSld>
   <p:clrMapOvr>
     <a:masterClrMapping/>
   </p:clrMapOvr>
-  <mc:AlternateContent xmlns:mc="http://schemas.openxmlformats.org/markup-compatibility/2006">
-    <mc:Choice xmlns:p159="http://schemas.microsoft.com/office/powerpoint/2015/09/main" Requires="p159">
+  <mc:AlternateContent xmlns:mc="http://schemas.openxmlformats.org/markup-compatibility/2006" xmlns:p159="http://schemas.microsoft.com/office/powerpoint/2015/09/main">
+    <mc:Choice Requires="p159">
       <p:transition xmlns:p14="http://schemas.microsoft.com/office/powerpoint/2010/main" spd="slow" p14:dur="2000">
         <p159:morph option="byObject"/>
       </p:transition>
     </mc:Choice>
-    <mc:Fallback>
+    <mc:Fallback xmlns="">
       <p:transition spd="slow">
         <p:fade/>
       </p:transition>
     </mc:Fallback>
   </mc:AlternateContent>
-</p:sld>
-</file>
-
-<file path=ppt/slides/slide8.xml><?xml version="1.0" encoding="utf-8"?>
-<p:sld xmlns:a="http://schemas.openxmlformats.org/drawingml/2006/main" xmlns:r="http://schemas.openxmlformats.org/officeDocument/2006/relationships" xmlns:p="http://schemas.openxmlformats.org/presentationml/2006/main">
-  <p:cSld>
-    <p:spTree>
-      <p:nvGrpSpPr>
-        <p:cNvPr id="1" name=""/>
-        <p:cNvGrpSpPr/>
-        <p:nvPr/>
-      </p:nvGrpSpPr>
-      <p:grpSpPr>
-        <a:xfrm>
-          <a:off x="0" y="0"/>
-          <a:ext cx="0" cy="0"/>
-          <a:chOff x="0" y="0"/>
-          <a:chExt cx="0" cy="0"/>
-        </a:xfrm>
-      </p:grpSpPr>
-      <p:sp>
-        <p:nvSpPr>
-          <p:cNvPr id="4" name="Title 3">
-            <a:extLst>
-              <a:ext uri="{FF2B5EF4-FFF2-40B4-BE49-F238E27FC236}">
-                <a16:creationId xmlns:a16="http://schemas.microsoft.com/office/drawing/2014/main" id="{5751BC45-CAED-BB43-A297-009708D51D81}"/>
-              </a:ext>
-            </a:extLst>
-          </p:cNvPr>
-          <p:cNvSpPr>
-            <a:spLocks noGrp="1"/>
-          </p:cNvSpPr>
-          <p:nvPr>
-            <p:ph type="title"/>
-          </p:nvPr>
-        </p:nvSpPr>
-        <p:spPr/>
-        <p:txBody>
-          <a:bodyPr/>
-          <a:lstStyle/>
-          <a:p>
-            <a:r>
-              <a:rPr lang="en-US" dirty="0"/>
-              <a:t>Quote</a:t>
-            </a:r>
-          </a:p>
-        </p:txBody>
-      </p:sp>
-      <p:sp>
-        <p:nvSpPr>
-          <p:cNvPr id="6" name="Content Placeholder 5">
-            <a:extLst>
-              <a:ext uri="{FF2B5EF4-FFF2-40B4-BE49-F238E27FC236}">
-                <a16:creationId xmlns:a16="http://schemas.microsoft.com/office/drawing/2014/main" id="{062B897C-9D62-36E3-5DC1-154478A93ECF}"/>
-              </a:ext>
-            </a:extLst>
-          </p:cNvPr>
-          <p:cNvSpPr>
-            <a:spLocks noGrp="1"/>
-          </p:cNvSpPr>
-          <p:nvPr>
-            <p:ph sz="quarter" idx="13"/>
-          </p:nvPr>
-        </p:nvSpPr>
-        <p:spPr/>
-        <p:txBody>
-          <a:bodyPr/>
-          <a:lstStyle/>
-          <a:p>
-            <a:r>
-              <a:rPr lang="en-US" sz="8800" b="1" dirty="0"/>
-              <a:t>10 BILLION USD</a:t>
-            </a:r>
-          </a:p>
-        </p:txBody>
-      </p:sp>
-      <p:sp>
-        <p:nvSpPr>
-          <p:cNvPr id="5" name="Title 1">
-            <a:extLst>
-              <a:ext uri="{FF2B5EF4-FFF2-40B4-BE49-F238E27FC236}">
-                <a16:creationId xmlns:a16="http://schemas.microsoft.com/office/drawing/2014/main" id="{4B5C4C08-211C-4506-43A8-E826D07B32DC}"/>
-              </a:ext>
-            </a:extLst>
-          </p:cNvPr>
-          <p:cNvSpPr txBox="1">
-            <a:spLocks/>
-          </p:cNvSpPr>
-          <p:nvPr/>
-        </p:nvSpPr>
-        <p:spPr>
-          <a:xfrm>
-            <a:off x="970788" y="4489503"/>
-            <a:ext cx="10250424" cy="1933310"/>
-          </a:xfrm>
-          <a:prstGeom prst="rect">
-            <a:avLst/>
-          </a:prstGeom>
-        </p:spPr>
-        <p:txBody>
-          <a:bodyPr vert="horz" lIns="91440" tIns="45720" rIns="91440" bIns="45720" rtlCol="0" anchor="b">
-            <a:normAutofit/>
-          </a:bodyPr>
-          <a:lstStyle>
-            <a:lvl1pPr algn="l" defTabSz="914400" rtl="0" eaLnBrk="1" latinLnBrk="0" hangingPunct="1">
-              <a:lnSpc>
-                <a:spcPct val="85000"/>
-              </a:lnSpc>
-              <a:spcBef>
-                <a:spcPct val="0"/>
-              </a:spcBef>
-              <a:buNone/>
-              <a:defRPr sz="2800" b="0" kern="1200" spc="0" baseline="0">
-                <a:solidFill>
-                  <a:schemeClr val="tx1"/>
-                </a:solidFill>
-                <a:latin typeface="+mj-lt"/>
-                <a:ea typeface="+mj-ea"/>
-                <a:cs typeface="+mj-cs"/>
-              </a:defRPr>
-            </a:lvl1pPr>
-          </a:lstStyle>
-          <a:p>
-            <a:pPr algn="ctr"/>
-            <a:r>
-              <a:rPr lang="en-US" sz="2000" dirty="0"/>
-              <a:t>Is the money lost to electricity theft annually.</a:t>
-            </a:r>
-          </a:p>
-        </p:txBody>
-      </p:sp>
-    </p:spTree>
-    <p:extLst>
-      <p:ext uri="{BB962C8B-B14F-4D97-AF65-F5344CB8AC3E}">
-        <p14:creationId xmlns:p14="http://schemas.microsoft.com/office/powerpoint/2010/main" val="2949280008"/>
-      </p:ext>
-    </p:extLst>
-  </p:cSld>
-  <p:clrMapOvr>
-    <a:masterClrMapping/>
-  </p:clrMapOvr>
-</p:sld>
-</file>
-
-<file path=ppt/slides/slide9.xml><?xml version="1.0" encoding="utf-8"?>
-<p:sld xmlns:a="http://schemas.openxmlformats.org/drawingml/2006/main" xmlns:r="http://schemas.openxmlformats.org/officeDocument/2006/relationships" xmlns:p="http://schemas.openxmlformats.org/presentationml/2006/main">
-  <p:cSld>
-    <p:spTree>
-      <p:nvGrpSpPr>
-        <p:cNvPr id="1" name=""/>
-        <p:cNvGrpSpPr/>
-        <p:nvPr/>
-      </p:nvGrpSpPr>
-      <p:grpSpPr>
-        <a:xfrm>
-          <a:off x="0" y="0"/>
-          <a:ext cx="0" cy="0"/>
-          <a:chOff x="0" y="0"/>
-          <a:chExt cx="0" cy="0"/>
-        </a:xfrm>
-      </p:grpSpPr>
-      <p:sp>
-        <p:nvSpPr>
-          <p:cNvPr id="2" name="Title 1">
-            <a:extLst>
-              <a:ext uri="{FF2B5EF4-FFF2-40B4-BE49-F238E27FC236}">
-                <a16:creationId xmlns:a16="http://schemas.microsoft.com/office/drawing/2014/main" id="{2DBB3A6A-1BD8-8125-15E1-120A167C07FD}"/>
-              </a:ext>
-            </a:extLst>
-          </p:cNvPr>
-          <p:cNvSpPr>
-            <a:spLocks noGrp="1"/>
-          </p:cNvSpPr>
-          <p:nvPr>
-            <p:ph type="title"/>
-          </p:nvPr>
-        </p:nvSpPr>
-        <p:spPr/>
-        <p:txBody>
-          <a:bodyPr/>
-          <a:lstStyle/>
-          <a:p>
-            <a:endParaRPr lang="en-IN"/>
-          </a:p>
-        </p:txBody>
-      </p:sp>
-      <p:sp>
-        <p:nvSpPr>
-          <p:cNvPr id="3" name="Content Placeholder 2">
-            <a:extLst>
-              <a:ext uri="{FF2B5EF4-FFF2-40B4-BE49-F238E27FC236}">
-                <a16:creationId xmlns:a16="http://schemas.microsoft.com/office/drawing/2014/main" id="{75E74510-291B-9C5B-E362-F7709E2D36C2}"/>
-              </a:ext>
-            </a:extLst>
-          </p:cNvPr>
-          <p:cNvSpPr>
-            <a:spLocks noGrp="1"/>
-          </p:cNvSpPr>
-          <p:nvPr>
-            <p:ph sz="quarter" idx="13"/>
-          </p:nvPr>
-        </p:nvSpPr>
-        <p:spPr>
-          <a:xfrm>
-            <a:off x="419100" y="561268"/>
-            <a:ext cx="11353800" cy="5735465"/>
-          </a:xfrm>
-        </p:spPr>
-        <p:txBody>
-          <a:bodyPr/>
-          <a:lstStyle/>
-          <a:p>
-            <a:r>
-              <a:rPr lang="en-IN" sz="6000" b="1" dirty="0"/>
-              <a:t>42 THOUSAND ENTRIES</a:t>
-            </a:r>
-          </a:p>
-        </p:txBody>
-      </p:sp>
-      <p:sp>
-        <p:nvSpPr>
-          <p:cNvPr id="5" name="Title 1">
-            <a:extLst>
-              <a:ext uri="{FF2B5EF4-FFF2-40B4-BE49-F238E27FC236}">
-                <a16:creationId xmlns:a16="http://schemas.microsoft.com/office/drawing/2014/main" id="{D3F908AE-F2E0-BF65-87CE-8B663A551E35}"/>
-              </a:ext>
-            </a:extLst>
-          </p:cNvPr>
-          <p:cNvSpPr txBox="1">
-            <a:spLocks/>
-          </p:cNvSpPr>
-          <p:nvPr/>
-        </p:nvSpPr>
-        <p:spPr>
-          <a:xfrm>
-            <a:off x="970788" y="4489503"/>
-            <a:ext cx="10250424" cy="1933310"/>
-          </a:xfrm>
-          <a:prstGeom prst="rect">
-            <a:avLst/>
-          </a:prstGeom>
-        </p:spPr>
-        <p:txBody>
-          <a:bodyPr vert="horz" lIns="91440" tIns="45720" rIns="91440" bIns="45720" rtlCol="0" anchor="b">
-            <a:normAutofit/>
-          </a:bodyPr>
-          <a:lstStyle>
-            <a:lvl1pPr algn="l" defTabSz="914400" rtl="0" eaLnBrk="1" latinLnBrk="0" hangingPunct="1">
-              <a:lnSpc>
-                <a:spcPct val="85000"/>
-              </a:lnSpc>
-              <a:spcBef>
-                <a:spcPct val="0"/>
-              </a:spcBef>
-              <a:buNone/>
-              <a:defRPr sz="2800" b="0" kern="1200" spc="0" baseline="0">
-                <a:solidFill>
-                  <a:schemeClr val="tx1"/>
-                </a:solidFill>
-                <a:latin typeface="+mj-lt"/>
-                <a:ea typeface="+mj-ea"/>
-                <a:cs typeface="+mj-cs"/>
-              </a:defRPr>
-            </a:lvl1pPr>
-          </a:lstStyle>
-          <a:p>
-            <a:pPr algn="ctr"/>
-            <a:r>
-              <a:rPr lang="en-US" sz="2000" dirty="0"/>
-              <a:t>the average amount of meter readings that is taken over many years, which makes it nearly impossible for human understanding and analysis. Hence, this system directs teams </a:t>
-            </a:r>
-            <a:r>
-              <a:rPr lang="en-US" sz="2000" dirty="0" err="1"/>
-              <a:t>tohigh</a:t>
-            </a:r>
-            <a:r>
-              <a:rPr lang="en-US" sz="2000" dirty="0"/>
-              <a:t>-risk meters first.</a:t>
-            </a:r>
-          </a:p>
-        </p:txBody>
-      </p:sp>
-    </p:spTree>
-    <p:extLst>
-      <p:ext uri="{BB962C8B-B14F-4D97-AF65-F5344CB8AC3E}">
-        <p14:creationId xmlns:p14="http://schemas.microsoft.com/office/powerpoint/2010/main" val="2892958320"/>
-      </p:ext>
-    </p:extLst>
-  </p:cSld>
-  <p:clrMapOvr>
-    <a:masterClrMapping/>
-  </p:clrMapOvr>
 </p:sld>
 </file>
 
@@ -14296,35 +13920,6 @@
 </file>
 
 <file path=customXml/item1.xml><?xml version="1.0" encoding="utf-8"?>
-<p:properties xmlns:p="http://schemas.microsoft.com/office/2006/metadata/properties" xmlns:xsi="http://www.w3.org/2001/XMLSchema-instance" xmlns:pc="http://schemas.microsoft.com/office/infopath/2007/PartnerControls">
-  <documentManagement>
-    <_ip_UnifiedCompliancePolicyUIAction xmlns="http://schemas.microsoft.com/sharepoint/v3" xsi:nil="true"/>
-    <Image xmlns="71af3243-3dd4-4a8d-8c0d-dd76da1f02a5">
-      <Url xsi:nil="true"/>
-      <Description xsi:nil="true"/>
-    </Image>
-    <Status xmlns="71af3243-3dd4-4a8d-8c0d-dd76da1f02a5">Not started</Status>
-    <Background xmlns="71af3243-3dd4-4a8d-8c0d-dd76da1f02a5">false</Background>
-    <_ip_UnifiedCompliancePolicyProperties xmlns="http://schemas.microsoft.com/sharepoint/v3" xsi:nil="true"/>
-    <ImageTagsTaxHTField xmlns="71af3243-3dd4-4a8d-8c0d-dd76da1f02a5">
-      <Terms xmlns="http://schemas.microsoft.com/office/infopath/2007/PartnerControls"/>
-    </ImageTagsTaxHTField>
-    <TaxCatchAll xmlns="230e9df3-be65-4c73-a93b-d1236ebd677e" xsi:nil="true"/>
-    <MediaServiceKeyPoints xmlns="71af3243-3dd4-4a8d-8c0d-dd76da1f02a5" xsi:nil="true"/>
-  </documentManagement>
-</p:properties>
-</file>
-
-<file path=customXml/item2.xml><?xml version="1.0" encoding="utf-8"?>
-<?mso-contentType ?>
-<FormTemplates xmlns="http://schemas.microsoft.com/sharepoint/v3/contenttype/forms">
-  <Display>DocumentLibraryForm</Display>
-  <Edit>DocumentLibraryForm</Edit>
-  <New>DocumentLibraryForm</New>
-</FormTemplates>
-</file>
-
-<file path=customXml/item3.xml><?xml version="1.0" encoding="utf-8"?>
 <ct:contentTypeSchema xmlns:ct="http://schemas.microsoft.com/office/2006/metadata/contentType" xmlns:ma="http://schemas.microsoft.com/office/2006/metadata/properties/metaAttributes" ct:_="" ma:_="" ma:contentTypeName="Document" ma:contentTypeID="0x01010079F111ED35F8CC479449609E8A0923A6" ma:contentTypeVersion="30" ma:contentTypeDescription="Create a new document." ma:contentTypeScope="" ma:versionID="cec0622158e8f13124e9e8fd4de31bd1">
   <xsd:schema xmlns:xsd="http://www.w3.org/2001/XMLSchema" xmlns:xs="http://www.w3.org/2001/XMLSchema" xmlns:p="http://schemas.microsoft.com/office/2006/metadata/properties" xmlns:ns1="http://schemas.microsoft.com/sharepoint/v3" xmlns:ns2="71af3243-3dd4-4a8d-8c0d-dd76da1f02a5" xmlns:ns3="16c05727-aa75-4e4a-9b5f-8a80a1165891" xmlns:ns4="230e9df3-be65-4c73-a93b-d1236ebd677e" targetNamespace="http://schemas.microsoft.com/office/2006/metadata/properties" ma:root="true" ma:fieldsID="3b52f30ab005d15df08657af532e6e38" ns1:_="" ns2:_="" ns3:_="" ns4:_="">
     <xsd:import namespace="http://schemas.microsoft.com/sharepoint/v3"/>
@@ -14642,34 +14237,36 @@
 </ct:contentTypeSchema>
 </file>
 
-<file path=customXml/itemProps1.xml><?xml version="1.0" encoding="utf-8"?>
-<ds:datastoreItem xmlns:ds="http://schemas.openxmlformats.org/officeDocument/2006/customXml" ds:itemID="{EF782DA7-86C0-4A84-A860-11A1E6E3FB6B}">
-  <ds:schemaRefs>
-    <ds:schemaRef ds:uri="http://www.w3.org/XML/1998/namespace"/>
-    <ds:schemaRef ds:uri="http://schemas.microsoft.com/office/2006/documentManagement/types"/>
-    <ds:schemaRef ds:uri="http://purl.org/dc/elements/1.1/"/>
-    <ds:schemaRef ds:uri="http://purl.org/dc/terms/"/>
-    <ds:schemaRef ds:uri="http://purl.org/dc/dcmitype/"/>
-    <ds:schemaRef ds:uri="http://schemas.microsoft.com/office/infopath/2007/PartnerControls"/>
-    <ds:schemaRef ds:uri="71af3243-3dd4-4a8d-8c0d-dd76da1f02a5"/>
-    <ds:schemaRef ds:uri="http://schemas.microsoft.com/sharepoint/v3"/>
-    <ds:schemaRef ds:uri="http://schemas.microsoft.com/office/2006/metadata/properties"/>
-    <ds:schemaRef ds:uri="http://schemas.openxmlformats.org/package/2006/metadata/core-properties"/>
-    <ds:schemaRef ds:uri="230e9df3-be65-4c73-a93b-d1236ebd677e"/>
-    <ds:schemaRef ds:uri="16c05727-aa75-4e4a-9b5f-8a80a1165891"/>
-  </ds:schemaRefs>
-</ds:datastoreItem>
+<file path=customXml/item2.xml><?xml version="1.0" encoding="utf-8"?>
+<?mso-contentType ?>
+<FormTemplates xmlns="http://schemas.microsoft.com/sharepoint/v3/contenttype/forms">
+  <Display>DocumentLibraryForm</Display>
+  <Edit>DocumentLibraryForm</Edit>
+  <New>DocumentLibraryForm</New>
+</FormTemplates>
 </file>
 
-<file path=customXml/itemProps2.xml><?xml version="1.0" encoding="utf-8"?>
-<ds:datastoreItem xmlns:ds="http://schemas.openxmlformats.org/officeDocument/2006/customXml" ds:itemID="{076F8FCD-0A1F-4F6A-8F55-15E9E87E2E4C}">
-  <ds:schemaRefs>
-    <ds:schemaRef ds:uri="http://schemas.microsoft.com/sharepoint/v3/contenttype/forms"/>
-  </ds:schemaRefs>
-</ds:datastoreItem>
+<file path=customXml/item3.xml><?xml version="1.0" encoding="utf-8"?>
+<p:properties xmlns:p="http://schemas.microsoft.com/office/2006/metadata/properties" xmlns:xsi="http://www.w3.org/2001/XMLSchema-instance" xmlns:pc="http://schemas.microsoft.com/office/infopath/2007/PartnerControls">
+  <documentManagement>
+    <_ip_UnifiedCompliancePolicyUIAction xmlns="http://schemas.microsoft.com/sharepoint/v3" xsi:nil="true"/>
+    <Image xmlns="71af3243-3dd4-4a8d-8c0d-dd76da1f02a5">
+      <Url xsi:nil="true"/>
+      <Description xsi:nil="true"/>
+    </Image>
+    <Status xmlns="71af3243-3dd4-4a8d-8c0d-dd76da1f02a5">Not started</Status>
+    <Background xmlns="71af3243-3dd4-4a8d-8c0d-dd76da1f02a5">false</Background>
+    <_ip_UnifiedCompliancePolicyProperties xmlns="http://schemas.microsoft.com/sharepoint/v3" xsi:nil="true"/>
+    <ImageTagsTaxHTField xmlns="71af3243-3dd4-4a8d-8c0d-dd76da1f02a5">
+      <Terms xmlns="http://schemas.microsoft.com/office/infopath/2007/PartnerControls"/>
+    </ImageTagsTaxHTField>
+    <TaxCatchAll xmlns="230e9df3-be65-4c73-a93b-d1236ebd677e" xsi:nil="true"/>
+    <MediaServiceKeyPoints xmlns="71af3243-3dd4-4a8d-8c0d-dd76da1f02a5" xsi:nil="true"/>
+  </documentManagement>
+</p:properties>
 </file>
 
-<file path=customXml/itemProps3.xml><?xml version="1.0" encoding="utf-8"?>
+<file path=customXml/itemProps1.xml><?xml version="1.0" encoding="utf-8"?>
 <ds:datastoreItem xmlns:ds="http://schemas.openxmlformats.org/officeDocument/2006/customXml" ds:itemID="{83A9C388-2C06-4AF2-857C-74055069A297}">
   <ds:schemaRefs>
     <ds:schemaRef ds:uri="http://schemas.microsoft.com/office/2006/metadata/contentType"/>
@@ -14690,6 +14287,33 @@
 </ds:datastoreItem>
 </file>
 
+<file path=customXml/itemProps2.xml><?xml version="1.0" encoding="utf-8"?>
+<ds:datastoreItem xmlns:ds="http://schemas.openxmlformats.org/officeDocument/2006/customXml" ds:itemID="{076F8FCD-0A1F-4F6A-8F55-15E9E87E2E4C}">
+  <ds:schemaRefs>
+    <ds:schemaRef ds:uri="http://schemas.microsoft.com/sharepoint/v3/contenttype/forms"/>
+  </ds:schemaRefs>
+</ds:datastoreItem>
+</file>
+
+<file path=customXml/itemProps3.xml><?xml version="1.0" encoding="utf-8"?>
+<ds:datastoreItem xmlns:ds="http://schemas.openxmlformats.org/officeDocument/2006/customXml" ds:itemID="{EF782DA7-86C0-4A84-A860-11A1E6E3FB6B}">
+  <ds:schemaRefs>
+    <ds:schemaRef ds:uri="http://www.w3.org/XML/1998/namespace"/>
+    <ds:schemaRef ds:uri="http://schemas.microsoft.com/office/2006/documentManagement/types"/>
+    <ds:schemaRef ds:uri="http://purl.org/dc/elements/1.1/"/>
+    <ds:schemaRef ds:uri="http://purl.org/dc/terms/"/>
+    <ds:schemaRef ds:uri="http://purl.org/dc/dcmitype/"/>
+    <ds:schemaRef ds:uri="http://schemas.microsoft.com/office/infopath/2007/PartnerControls"/>
+    <ds:schemaRef ds:uri="71af3243-3dd4-4a8d-8c0d-dd76da1f02a5"/>
+    <ds:schemaRef ds:uri="http://schemas.microsoft.com/sharepoint/v3"/>
+    <ds:schemaRef ds:uri="http://schemas.microsoft.com/office/2006/metadata/properties"/>
+    <ds:schemaRef ds:uri="http://schemas.openxmlformats.org/package/2006/metadata/core-properties"/>
+    <ds:schemaRef ds:uri="230e9df3-be65-4c73-a93b-d1236ebd677e"/>
+    <ds:schemaRef ds:uri="16c05727-aa75-4e4a-9b5f-8a80a1165891"/>
+  </ds:schemaRefs>
+</ds:datastoreItem>
+</file>
+
 <file path=docMetadata/LabelInfo.xml><?xml version="1.0" encoding="utf-8"?>
 <clbl:labelList xmlns:clbl="http://schemas.microsoft.com/office/2020/mipLabelMetadata"/>
 </file>
--- a/backend/FINAL REVIEW.pptx
+++ b/backend/FINAL REVIEW.pptx
@@ -11,8 +11,8 @@
     <p:handoutMasterId r:id="rId21"/>
   </p:handoutMasterIdLst>
   <p:sldIdLst>
-    <p:sldId id="1497" r:id="rId5"/>
-    <p:sldId id="1514" r:id="rId6"/>
+    <p:sldId id="1514" r:id="rId5"/>
+    <p:sldId id="1497" r:id="rId6"/>
     <p:sldId id="1529" r:id="rId7"/>
     <p:sldId id="1528" r:id="rId8"/>
     <p:sldId id="1499" r:id="rId9"/>
@@ -11080,7 +11080,7 @@
           <p:cNvPr id="2" name="Title 1">
             <a:extLst>
               <a:ext uri="{FF2B5EF4-FFF2-40B4-BE49-F238E27FC236}">
-                <a16:creationId xmlns:a16="http://schemas.microsoft.com/office/drawing/2014/main" id="{1F057989-07E4-B482-9F2A-EBF670F7FA92}"/>
+                <a16:creationId xmlns:a16="http://schemas.microsoft.com/office/drawing/2014/main" id="{F31FB56E-1A01-8D29-F217-638F3BEF697B}"/>
               </a:ext>
             </a:extLst>
           </p:cNvPr>
@@ -11091,113 +11091,116 @@
             <p:ph type="title"/>
           </p:nvPr>
         </p:nvSpPr>
-        <p:spPr>
-          <a:xfrm>
-            <a:off x="1866162" y="2350108"/>
-            <a:ext cx="8686801" cy="2565902"/>
-          </a:xfrm>
-        </p:spPr>
+        <p:spPr/>
+        <p:txBody>
+          <a:bodyPr/>
+          <a:lstStyle/>
+          <a:p>
+            <a:r>
+              <a:rPr lang="en-US" dirty="0"/>
+              <a:t>Welcome!</a:t>
+            </a:r>
+          </a:p>
+        </p:txBody>
+      </p:sp>
+      <p:sp>
+        <p:nvSpPr>
+          <p:cNvPr id="3" name="Content Placeholder 2">
+            <a:extLst>
+              <a:ext uri="{FF2B5EF4-FFF2-40B4-BE49-F238E27FC236}">
+                <a16:creationId xmlns:a16="http://schemas.microsoft.com/office/drawing/2014/main" id="{8DE9521F-CC42-235E-F804-B826A36205D1}"/>
+              </a:ext>
+            </a:extLst>
+          </p:cNvPr>
+          <p:cNvSpPr>
+            <a:spLocks noGrp="1"/>
+          </p:cNvSpPr>
+          <p:nvPr>
+            <p:ph sz="quarter" idx="14"/>
+          </p:nvPr>
+        </p:nvSpPr>
+        <p:spPr/>
         <p:txBody>
           <a:bodyPr>
             <a:normAutofit/>
           </a:bodyPr>
           <a:lstStyle/>
           <a:p>
-            <a:r>
-              <a:rPr lang="en-US" dirty="0"/>
-              <a:t>AI-driven Temporal Anomaly Detection in Smart Grids</a:t>
-            </a:r>
-          </a:p>
-        </p:txBody>
-      </p:sp>
-      <p:sp>
-        <p:nvSpPr>
-          <p:cNvPr id="3" name="Subtitle 2">
-            <a:extLst>
-              <a:ext uri="{FF2B5EF4-FFF2-40B4-BE49-F238E27FC236}">
-                <a16:creationId xmlns:a16="http://schemas.microsoft.com/office/drawing/2014/main" id="{363CF5F8-0028-8636-5006-5D5C52B32774}"/>
-              </a:ext>
-            </a:extLst>
-          </p:cNvPr>
-          <p:cNvSpPr>
-            <a:spLocks noGrp="1"/>
-          </p:cNvSpPr>
-          <p:nvPr>
-            <p:ph type="body" sz="quarter" idx="13"/>
-          </p:nvPr>
-        </p:nvSpPr>
+            <a:pPr marL="0" indent="0">
+              <a:buNone/>
+            </a:pPr>
+            <a:r>
+              <a:rPr lang="en-US" sz="2000" b="1" dirty="0" err="1"/>
+              <a:t>Shamithaa</a:t>
+            </a:r>
+            <a:r>
+              <a:rPr lang="en-US" sz="2000" b="1" dirty="0"/>
+              <a:t> Uday 24BAI1416</a:t>
+            </a:r>
+          </a:p>
+          <a:p>
+            <a:pPr marL="0" indent="0">
+              <a:buNone/>
+            </a:pPr>
+            <a:r>
+              <a:rPr lang="en-US" sz="2000" b="1" dirty="0"/>
+              <a:t>Piyush Chandra Varman 24BAI1526</a:t>
+            </a:r>
+          </a:p>
+          <a:p>
+            <a:pPr marL="0" indent="0">
+              <a:buNone/>
+            </a:pPr>
+            <a:r>
+              <a:rPr lang="en-US" sz="2000" b="1" dirty="0" err="1"/>
+              <a:t>Harshne</a:t>
+            </a:r>
+            <a:r>
+              <a:rPr lang="en-US" sz="2000" b="1" dirty="0"/>
+              <a:t> 24BAI1619</a:t>
+            </a:r>
+          </a:p>
+          <a:p>
+            <a:pPr marL="0" indent="0">
+              <a:buNone/>
+            </a:pPr>
+            <a:endParaRPr lang="en-US" sz="2000" dirty="0"/>
+          </a:p>
+        </p:txBody>
+      </p:sp>
+      <p:pic>
+        <p:nvPicPr>
+          <p:cNvPr id="15" name="Picture Placeholder 14" descr="A white object on a white surface">
+            <a:extLst>
+              <a:ext uri="{FF2B5EF4-FFF2-40B4-BE49-F238E27FC236}">
+                <a16:creationId xmlns:a16="http://schemas.microsoft.com/office/drawing/2014/main" id="{7270AD1A-8F9F-BF9D-AE26-986ADE7EF350}"/>
+              </a:ext>
+            </a:extLst>
+          </p:cNvPr>
+          <p:cNvPicPr>
+            <a:picLocks noGrp="1" noChangeAspect="1"/>
+          </p:cNvPicPr>
+          <p:nvPr>
+            <p:ph type="pic" sz="quarter" idx="13"/>
+          </p:nvPr>
+        </p:nvPicPr>
+        <p:blipFill>
+          <a:blip r:embed="rId2">
+            <a:extLst>
+              <a:ext uri="{28A0092B-C50C-407E-A947-70E740481C1C}">
+                <a14:useLocalDpi xmlns:a14="http://schemas.microsoft.com/office/drawing/2010/main" val="0"/>
+              </a:ext>
+            </a:extLst>
+          </a:blip>
+          <a:srcRect t="41" b="41"/>
+          <a:stretch/>
+        </p:blipFill>
         <p:spPr/>
-        <p:txBody>
-          <a:bodyPr>
-            <a:normAutofit/>
-          </a:bodyPr>
-          <a:lstStyle/>
-          <a:p>
-            <a:r>
-              <a:rPr lang="en-US" i="1" dirty="0"/>
-              <a:t>3VS</a:t>
-            </a:r>
-          </a:p>
-        </p:txBody>
-      </p:sp>
-      <p:sp>
-        <p:nvSpPr>
-          <p:cNvPr id="6" name="Title 1">
-            <a:extLst>
-              <a:ext uri="{FF2B5EF4-FFF2-40B4-BE49-F238E27FC236}">
-                <a16:creationId xmlns:a16="http://schemas.microsoft.com/office/drawing/2014/main" id="{1D7F66A9-8EBC-7C8E-5081-B1C80FA064EA}"/>
-              </a:ext>
-            </a:extLst>
-          </p:cNvPr>
-          <p:cNvSpPr txBox="1">
-            <a:spLocks/>
-          </p:cNvSpPr>
-          <p:nvPr/>
-        </p:nvSpPr>
-        <p:spPr>
-          <a:xfrm>
-            <a:off x="1947135" y="3429000"/>
-            <a:ext cx="7525512" cy="1933310"/>
-          </a:xfrm>
-          <a:prstGeom prst="rect">
-            <a:avLst/>
-          </a:prstGeom>
-        </p:spPr>
-        <p:txBody>
-          <a:bodyPr vert="horz" lIns="91440" tIns="45720" rIns="91440" bIns="45720" rtlCol="0" anchor="b">
-            <a:normAutofit/>
-          </a:bodyPr>
-          <a:lstStyle>
-            <a:lvl1pPr algn="l" defTabSz="914400" rtl="0" eaLnBrk="1" latinLnBrk="0" hangingPunct="1">
-              <a:lnSpc>
-                <a:spcPct val="80000"/>
-              </a:lnSpc>
-              <a:spcBef>
-                <a:spcPct val="0"/>
-              </a:spcBef>
-              <a:buNone/>
-              <a:defRPr sz="6600" b="0" kern="1200" spc="-110" baseline="0">
-                <a:solidFill>
-                  <a:schemeClr val="tx1"/>
-                </a:solidFill>
-                <a:latin typeface="+mj-lt"/>
-                <a:ea typeface="+mj-ea"/>
-                <a:cs typeface="+mj-cs"/>
-              </a:defRPr>
-            </a:lvl1pPr>
-          </a:lstStyle>
-          <a:p>
-            <a:r>
-              <a:rPr lang="en-US" sz="2000" i="1" spc="0" dirty="0"/>
-              <a:t>Electricity Theft Detection Problem Statement</a:t>
-            </a:r>
-          </a:p>
-        </p:txBody>
-      </p:sp>
+      </p:pic>
     </p:spTree>
     <p:extLst>
       <p:ext uri="{BB962C8B-B14F-4D97-AF65-F5344CB8AC3E}">
-        <p14:creationId xmlns:p14="http://schemas.microsoft.com/office/powerpoint/2010/main" val="1773831372"/>
+        <p14:creationId xmlns:p14="http://schemas.microsoft.com/office/powerpoint/2010/main" val="2002021855"/>
       </p:ext>
     </p:extLst>
   </p:cSld>
@@ -12256,6 +12259,18 @@
   <p:clrMapOvr>
     <a:masterClrMapping/>
   </p:clrMapOvr>
+  <mc:AlternateContent xmlns:mc="http://schemas.openxmlformats.org/markup-compatibility/2006">
+    <mc:Choice xmlns:p159="http://schemas.microsoft.com/office/powerpoint/2015/09/main" Requires="p159">
+      <p:transition xmlns:p14="http://schemas.microsoft.com/office/powerpoint/2010/main" spd="slow" p14:dur="2000">
+        <p159:morph option="byObject"/>
+      </p:transition>
+    </mc:Choice>
+    <mc:Fallback>
+      <p:transition spd="slow">
+        <p:fade/>
+      </p:transition>
+    </mc:Fallback>
+  </mc:AlternateContent>
 </p:sld>
 </file>
 
@@ -12281,7 +12296,7 @@
           <p:cNvPr id="2" name="Title 1">
             <a:extLst>
               <a:ext uri="{FF2B5EF4-FFF2-40B4-BE49-F238E27FC236}">
-                <a16:creationId xmlns:a16="http://schemas.microsoft.com/office/drawing/2014/main" id="{F31FB56E-1A01-8D29-F217-638F3BEF697B}"/>
+                <a16:creationId xmlns:a16="http://schemas.microsoft.com/office/drawing/2014/main" id="{1F057989-07E4-B482-9F2A-EBF670F7FA92}"/>
               </a:ext>
             </a:extLst>
           </p:cNvPr>
@@ -12292,116 +12307,113 @@
             <p:ph type="title"/>
           </p:nvPr>
         </p:nvSpPr>
-        <p:spPr/>
-        <p:txBody>
-          <a:bodyPr/>
-          <a:lstStyle/>
-          <a:p>
-            <a:r>
-              <a:rPr lang="en-US" dirty="0"/>
-              <a:t>Welcome!</a:t>
-            </a:r>
-          </a:p>
-        </p:txBody>
-      </p:sp>
-      <p:sp>
-        <p:nvSpPr>
-          <p:cNvPr id="3" name="Content Placeholder 2">
-            <a:extLst>
-              <a:ext uri="{FF2B5EF4-FFF2-40B4-BE49-F238E27FC236}">
-                <a16:creationId xmlns:a16="http://schemas.microsoft.com/office/drawing/2014/main" id="{8DE9521F-CC42-235E-F804-B826A36205D1}"/>
-              </a:ext>
-            </a:extLst>
-          </p:cNvPr>
-          <p:cNvSpPr>
-            <a:spLocks noGrp="1"/>
-          </p:cNvSpPr>
-          <p:nvPr>
-            <p:ph sz="quarter" idx="14"/>
-          </p:nvPr>
-        </p:nvSpPr>
-        <p:spPr/>
+        <p:spPr>
+          <a:xfrm>
+            <a:off x="1866162" y="2350108"/>
+            <a:ext cx="8686801" cy="2565902"/>
+          </a:xfrm>
+        </p:spPr>
         <p:txBody>
           <a:bodyPr>
             <a:normAutofit/>
           </a:bodyPr>
           <a:lstStyle/>
           <a:p>
-            <a:pPr marL="0" indent="0">
+            <a:r>
+              <a:rPr lang="en-US" dirty="0"/>
+              <a:t>AI-driven Temporal Anomaly Detection in Smart Grids</a:t>
+            </a:r>
+          </a:p>
+        </p:txBody>
+      </p:sp>
+      <p:sp>
+        <p:nvSpPr>
+          <p:cNvPr id="3" name="Subtitle 2">
+            <a:extLst>
+              <a:ext uri="{FF2B5EF4-FFF2-40B4-BE49-F238E27FC236}">
+                <a16:creationId xmlns:a16="http://schemas.microsoft.com/office/drawing/2014/main" id="{363CF5F8-0028-8636-5006-5D5C52B32774}"/>
+              </a:ext>
+            </a:extLst>
+          </p:cNvPr>
+          <p:cNvSpPr>
+            <a:spLocks noGrp="1"/>
+          </p:cNvSpPr>
+          <p:nvPr>
+            <p:ph type="body" sz="quarter" idx="13"/>
+          </p:nvPr>
+        </p:nvSpPr>
+        <p:spPr/>
+        <p:txBody>
+          <a:bodyPr>
+            <a:normAutofit/>
+          </a:bodyPr>
+          <a:lstStyle/>
+          <a:p>
+            <a:r>
+              <a:rPr lang="en-US" i="1" dirty="0"/>
+              <a:t>3VS</a:t>
+            </a:r>
+          </a:p>
+        </p:txBody>
+      </p:sp>
+      <p:sp>
+        <p:nvSpPr>
+          <p:cNvPr id="6" name="Title 1">
+            <a:extLst>
+              <a:ext uri="{FF2B5EF4-FFF2-40B4-BE49-F238E27FC236}">
+                <a16:creationId xmlns:a16="http://schemas.microsoft.com/office/drawing/2014/main" id="{1D7F66A9-8EBC-7C8E-5081-B1C80FA064EA}"/>
+              </a:ext>
+            </a:extLst>
+          </p:cNvPr>
+          <p:cNvSpPr txBox="1">
+            <a:spLocks/>
+          </p:cNvSpPr>
+          <p:nvPr/>
+        </p:nvSpPr>
+        <p:spPr>
+          <a:xfrm>
+            <a:off x="1947135" y="3429000"/>
+            <a:ext cx="7525512" cy="1933310"/>
+          </a:xfrm>
+          <a:prstGeom prst="rect">
+            <a:avLst/>
+          </a:prstGeom>
+        </p:spPr>
+        <p:txBody>
+          <a:bodyPr vert="horz" lIns="91440" tIns="45720" rIns="91440" bIns="45720" rtlCol="0" anchor="b">
+            <a:normAutofit/>
+          </a:bodyPr>
+          <a:lstStyle>
+            <a:lvl1pPr algn="l" defTabSz="914400" rtl="0" eaLnBrk="1" latinLnBrk="0" hangingPunct="1">
+              <a:lnSpc>
+                <a:spcPct val="80000"/>
+              </a:lnSpc>
+              <a:spcBef>
+                <a:spcPct val="0"/>
+              </a:spcBef>
               <a:buNone/>
-            </a:pPr>
-            <a:r>
-              <a:rPr lang="en-US" sz="2000" b="1" dirty="0" err="1"/>
-              <a:t>Shamithaa</a:t>
-            </a:r>
-            <a:r>
-              <a:rPr lang="en-US" sz="2000" b="1" dirty="0"/>
-              <a:t> Uday 24BAI1416</a:t>
-            </a:r>
-          </a:p>
-          <a:p>
-            <a:pPr marL="0" indent="0">
-              <a:buNone/>
-            </a:pPr>
-            <a:r>
-              <a:rPr lang="en-US" sz="2000" b="1" dirty="0"/>
-              <a:t>Piyush Chandra Varman 24BAI1526</a:t>
-            </a:r>
-          </a:p>
-          <a:p>
-            <a:pPr marL="0" indent="0">
-              <a:buNone/>
-            </a:pPr>
-            <a:r>
-              <a:rPr lang="en-US" sz="2000" b="1" dirty="0" err="1"/>
-              <a:t>Harshne</a:t>
-            </a:r>
-            <a:r>
-              <a:rPr lang="en-US" sz="2000" b="1" dirty="0"/>
-              <a:t> 24BAI1619</a:t>
-            </a:r>
-          </a:p>
-          <a:p>
-            <a:pPr marL="0" indent="0">
-              <a:buNone/>
-            </a:pPr>
-            <a:endParaRPr lang="en-US" sz="2000" dirty="0"/>
-          </a:p>
-        </p:txBody>
-      </p:sp>
-      <p:pic>
-        <p:nvPicPr>
-          <p:cNvPr id="15" name="Picture Placeholder 14" descr="A white object on a white surface">
-            <a:extLst>
-              <a:ext uri="{FF2B5EF4-FFF2-40B4-BE49-F238E27FC236}">
-                <a16:creationId xmlns:a16="http://schemas.microsoft.com/office/drawing/2014/main" id="{7270AD1A-8F9F-BF9D-AE26-986ADE7EF350}"/>
-              </a:ext>
-            </a:extLst>
-          </p:cNvPr>
-          <p:cNvPicPr>
-            <a:picLocks noGrp="1" noChangeAspect="1"/>
-          </p:cNvPicPr>
-          <p:nvPr>
-            <p:ph type="pic" sz="quarter" idx="13"/>
-          </p:nvPr>
-        </p:nvPicPr>
-        <p:blipFill>
-          <a:blip r:embed="rId2">
-            <a:extLst>
-              <a:ext uri="{28A0092B-C50C-407E-A947-70E740481C1C}">
-                <a14:useLocalDpi xmlns:a14="http://schemas.microsoft.com/office/drawing/2010/main" val="0"/>
-              </a:ext>
-            </a:extLst>
-          </a:blip>
-          <a:srcRect t="41" b="41"/>
-          <a:stretch/>
-        </p:blipFill>
-        <p:spPr/>
-      </p:pic>
+              <a:defRPr sz="6600" b="0" kern="1200" spc="-110" baseline="0">
+                <a:solidFill>
+                  <a:schemeClr val="tx1"/>
+                </a:solidFill>
+                <a:latin typeface="+mj-lt"/>
+                <a:ea typeface="+mj-ea"/>
+                <a:cs typeface="+mj-cs"/>
+              </a:defRPr>
+            </a:lvl1pPr>
+          </a:lstStyle>
+          <a:p>
+            <a:r>
+              <a:rPr lang="en-US" sz="2000" i="1" spc="0" dirty="0"/>
+              <a:t>Electricity Theft Detection Problem Statement</a:t>
+            </a:r>
+          </a:p>
+        </p:txBody>
+      </p:sp>
     </p:spTree>
     <p:extLst>
       <p:ext uri="{BB962C8B-B14F-4D97-AF65-F5344CB8AC3E}">
-        <p14:creationId xmlns:p14="http://schemas.microsoft.com/office/powerpoint/2010/main" val="2002021855"/>
+        <p14:creationId xmlns:p14="http://schemas.microsoft.com/office/powerpoint/2010/main" val="1773831372"/>
       </p:ext>
     </p:extLst>
   </p:cSld>
